--- a/docs/index.pptx
+++ b/docs/index.pptx
@@ -29,6 +29,13 @@
     <p:sldId id="277" r:id="rId23"/>
     <p:sldId id="278" r:id="rId24"/>
     <p:sldId id="279" r:id="rId25"/>
+    <p:sldId id="280" r:id="rId26"/>
+    <p:sldId id="281" r:id="rId27"/>
+    <p:sldId id="282" r:id="rId28"/>
+    <p:sldId id="283" r:id="rId29"/>
+    <p:sldId id="284" r:id="rId30"/>
+    <p:sldId id="285" r:id="rId31"/>
+    <p:sldId id="286" r:id="rId32"/>
   </p:sldIdLst>
   <p:sldSz cx="9144000" cy="5143500" type="screen16x9"/>
   <p:notesSz cx="6858000" cy="9144000"/>
@@ -4664,7 +4671,69 @@
             </a:pPr>
             <a:r>
               <a:rPr/>
-              <a:t>Introduction</a:t>
+              <a:t>Introduction (1/3)</a:t>
+            </a:r>
+          </a:p>
+        </p:txBody>
+      </p:sp>
+      <p:sp>
+        <p:nvSpPr>
+          <p:cNvPr id="3" name="Content Placeholder 2"/>
+          <p:cNvSpPr>
+            <a:spLocks noGrp="1"/>
+          </p:cNvSpPr>
+          <p:nvPr>
+            <p:ph idx="1"/>
+          </p:nvPr>
+        </p:nvSpPr>
+        <p:spPr/>
+        <p:txBody>
+          <a:bodyPr/>
+          <a:lstStyle/>
+          <a:p>
+            <a:pPr lvl="0"/>
+            <a:r>
+              <a:rPr/>
+              <a:t>Nix is actually more than just a mere package manager</a:t>
+            </a:r>
+          </a:p>
+          <a:p>
+            <a:pPr lvl="0"/>
+            <a:r>
+              <a:rPr/>
+              <a:t>Nix is complete end-to-end build tool that leverages functional programming principles to ensure reproducible builds</a:t>
+            </a:r>
+          </a:p>
+          <a:p>
+            <a:pPr lvl="0"/>
+            <a:r>
+              <a:rPr/>
+              <a:t>Users write Nix expressions which are then translated into Nix derivations</a:t>
+            </a:r>
+          </a:p>
+          <a:p>
+            <a:pPr lvl="0"/>
+            <a:r>
+              <a:rPr/>
+              <a:t>Derivation: </a:t>
+            </a:r>
+            <a:r>
+              <a:rPr i="1"/>
+              <a:t>a specification for running an executable on precisely defined input files to repeatably produce output files at uniquely determined file system paths.</a:t>
+            </a:r>
+            <a:r>
+              <a:rPr/>
+              <a:t> (</a:t>
+            </a:r>
+            <a:r>
+              <a:rPr>
+                <a:hlinkClick r:id="rId2"/>
+              </a:rPr>
+              <a:t>source</a:t>
+            </a:r>
+            <a:r>
+              <a:rPr/>
+              <a:t>)</a:t>
             </a:r>
           </a:p>
         </p:txBody>
@@ -4711,7 +4780,7 @@
             </a:pPr>
             <a:r>
               <a:rPr/>
-              <a:t>rixpress</a:t>
+              <a:t>Introduction (2/3)</a:t>
             </a:r>
           </a:p>
         </p:txBody>
@@ -4733,67 +4802,44 @@
           <a:p>
             <a:pPr lvl="0"/>
             <a:r>
-              <a:rPr>
-                <a:latin typeface="Courier"/>
-              </a:rPr>
-              <a:t>{rixpress}</a:t>
-            </a:r>
-            <a:r>
-              <a:rPr/>
-              <a:t> allows chaining processing steps in R </a:t>
-            </a:r>
-            <a:r>
-              <a:rPr b="1"/>
-              <a:t>and</a:t>
-            </a:r>
-            <a:r>
-              <a:rPr/>
-              <a:t> Python</a:t>
+              <a:rPr/>
+              <a:t>Essentially: a derivation is a recipe with precisely defined inputs, steps, and a fixed output.</a:t>
             </a:r>
           </a:p>
           <a:p>
             <a:pPr lvl="0"/>
             <a:r>
               <a:rPr/>
-              <a:t>Uses </a:t>
-            </a:r>
-            <a:r>
-              <a:rPr>
-                <a:latin typeface="Courier"/>
-              </a:rPr>
-              <a:t>{rix}</a:t>
-            </a:r>
-            <a:r>
-              <a:rPr/>
-              <a:t> to create a reproducible (via Nix) execution environment for the pipeline</a:t>
+              <a:t>Given identical inputs and build steps → always produce exact same output</a:t>
             </a:r>
           </a:p>
           <a:p>
             <a:pPr lvl="0"/>
             <a:r>
               <a:rPr/>
-              <a:t>Each pipeline step is a </a:t>
-            </a:r>
-            <a:r>
-              <a:rPr b="1"/>
-              <a:t>Nix derivation</a:t>
+              <a:t>All inputs to a derivation must be explicitly declared.</a:t>
             </a:r>
           </a:p>
           <a:p>
             <a:pPr lvl="0"/>
             <a:r>
               <a:rPr/>
-              <a:t>Data transfer: automatic via </a:t>
-            </a:r>
-            <a:r>
-              <a:rPr>
-                <a:latin typeface="Courier"/>
-              </a:rPr>
-              <a:t>reticulate</a:t>
-            </a:r>
-            <a:r>
-              <a:rPr/>
-              <a:t> or universal format (JSON)</a:t>
+              <a:t>Inputs include not just data files, but also software dependencies, configuration flags, and environment variables, essentially anything necessary for the build process.</a:t>
+            </a:r>
+          </a:p>
+          <a:p>
+            <a:pPr lvl="0"/>
+            <a:r>
+              <a:rPr/>
+              <a:t>The build process takes place in a </a:t>
+            </a:r>
+            <a:r>
+              <a:rPr i="1"/>
+              <a:t>hermetic</a:t>
+            </a:r>
+            <a:r>
+              <a:rPr/>
+              <a:t> sandbox to ensure the exact same output is always produced.</a:t>
             </a:r>
           </a:p>
         </p:txBody>
@@ -4912,7 +4958,7 @@
             </a:pPr>
             <a:r>
               <a:rPr/>
-              <a:t>An example of a mixed pipeline</a:t>
+              <a:t>Introduction (3/3)</a:t>
             </a:r>
           </a:p>
         </p:txBody>
@@ -4932,422 +4978,37 @@
           <a:bodyPr/>
           <a:lstStyle/>
           <a:p>
-            <a:pPr lvl="0" indent="0">
-              <a:buNone/>
-            </a:pPr>
-            <a:r>
-              <a:rPr>
-                <a:solidFill>
-                  <a:srgbClr val="4758AB"/>
-                </a:solidFill>
-                <a:latin typeface="Courier"/>
-              </a:rPr>
-              <a:t>list</a:t>
-            </a:r>
-            <a:r>
-              <a:rPr>
-                <a:solidFill>
-                  <a:srgbClr val="003B4F"/>
-                </a:solidFill>
-                <a:latin typeface="Courier"/>
-              </a:rPr>
-              <a:t>(</a:t>
-            </a:r>
-            <a:br/>
-            <a:r>
-              <a:rPr>
-                <a:solidFill>
-                  <a:srgbClr val="003B4F"/>
-                </a:solidFill>
-                <a:latin typeface="Courier"/>
-              </a:rPr>
-              <a:t>  </a:t>
-            </a:r>
-            <a:r>
-              <a:rPr>
-                <a:solidFill>
-                  <a:srgbClr val="4758AB"/>
-                </a:solidFill>
-                <a:latin typeface="Courier"/>
-              </a:rPr>
-              <a:t>rxp_py_file</a:t>
-            </a:r>
-            <a:r>
-              <a:rPr>
-                <a:solidFill>
-                  <a:srgbClr val="003B4F"/>
-                </a:solidFill>
-                <a:latin typeface="Courier"/>
-              </a:rPr>
-              <a:t>(…),    </a:t>
-            </a:r>
-            <a:r>
-              <a:rPr>
-                <a:solidFill>
-                  <a:srgbClr val="5E5E5E"/>
-                </a:solidFill>
-                <a:latin typeface="Courier"/>
-              </a:rPr>
-              <a:t># Read a CSV with Python</a:t>
-            </a:r>
-            <a:br/>
-            <a:r>
-              <a:rPr>
-                <a:solidFill>
-                  <a:srgbClr val="003B4F"/>
-                </a:solidFill>
-                <a:latin typeface="Courier"/>
-              </a:rPr>
-              <a:t>  </a:t>
-            </a:r>
-            <a:r>
-              <a:rPr>
-                <a:solidFill>
-                  <a:srgbClr val="4758AB"/>
-                </a:solidFill>
-                <a:latin typeface="Courier"/>
-              </a:rPr>
-              <a:t>rxp_py</a:t>
-            </a:r>
-            <a:r>
-              <a:rPr>
-                <a:solidFill>
-                  <a:srgbClr val="003B4F"/>
-                </a:solidFill>
-                <a:latin typeface="Courier"/>
-              </a:rPr>
-              <a:t>(…),         </a:t>
-            </a:r>
-            <a:r>
-              <a:rPr>
-                <a:solidFill>
-                  <a:srgbClr val="5E5E5E"/>
-                </a:solidFill>
-                <a:latin typeface="Courier"/>
-              </a:rPr>
-              <a:t># Filter with Polars</a:t>
-            </a:r>
-            <a:br/>
-            <a:r>
-              <a:rPr>
-                <a:solidFill>
-                  <a:srgbClr val="003B4F"/>
-                </a:solidFill>
-                <a:latin typeface="Courier"/>
-              </a:rPr>
-              <a:t>  </a:t>
-            </a:r>
-            <a:r>
-              <a:rPr>
-                <a:solidFill>
-                  <a:srgbClr val="4758AB"/>
-                </a:solidFill>
-                <a:latin typeface="Courier"/>
-              </a:rPr>
-              <a:t>rxp_py2r</a:t>
-            </a:r>
-            <a:r>
-              <a:rPr>
-                <a:solidFill>
-                  <a:srgbClr val="003B4F"/>
-                </a:solidFill>
-                <a:latin typeface="Courier"/>
-              </a:rPr>
-              <a:t>(…),       </a:t>
-            </a:r>
-            <a:r>
-              <a:rPr>
-                <a:solidFill>
-                  <a:srgbClr val="5E5E5E"/>
-                </a:solidFill>
-                <a:latin typeface="Courier"/>
-              </a:rPr>
-              <a:t># Python → R transfer</a:t>
-            </a:r>
-            <a:br/>
-            <a:r>
-              <a:rPr>
-                <a:solidFill>
-                  <a:srgbClr val="003B4F"/>
-                </a:solidFill>
-                <a:latin typeface="Courier"/>
-              </a:rPr>
-              <a:t>  </a:t>
-            </a:r>
-            <a:r>
-              <a:rPr>
-                <a:solidFill>
-                  <a:srgbClr val="4758AB"/>
-                </a:solidFill>
-                <a:latin typeface="Courier"/>
-              </a:rPr>
-              <a:t>rxp_r</a:t>
-            </a:r>
-            <a:r>
-              <a:rPr>
-                <a:solidFill>
-                  <a:srgbClr val="003B4F"/>
-                </a:solidFill>
-                <a:latin typeface="Courier"/>
-              </a:rPr>
-              <a:t>(…),          </a:t>
-            </a:r>
-            <a:r>
-              <a:rPr>
-                <a:solidFill>
-                  <a:srgbClr val="5E5E5E"/>
-                </a:solidFill>
-                <a:latin typeface="Courier"/>
-              </a:rPr>
-              <a:t># Transformation in R</a:t>
-            </a:r>
-            <a:br/>
-            <a:r>
-              <a:rPr>
-                <a:solidFill>
-                  <a:srgbClr val="003B4F"/>
-                </a:solidFill>
-                <a:latin typeface="Courier"/>
-              </a:rPr>
-              <a:t>  </a:t>
-            </a:r>
-            <a:r>
-              <a:rPr>
-                <a:solidFill>
-                  <a:srgbClr val="4758AB"/>
-                </a:solidFill>
-                <a:latin typeface="Courier"/>
-              </a:rPr>
-              <a:t>rxp_r2py</a:t>
-            </a:r>
-            <a:r>
-              <a:rPr>
-                <a:solidFill>
-                  <a:srgbClr val="003B4F"/>
-                </a:solidFill>
-                <a:latin typeface="Courier"/>
-              </a:rPr>
-              <a:t>(…),       </a:t>
-            </a:r>
-            <a:r>
-              <a:rPr>
-                <a:solidFill>
-                  <a:srgbClr val="5E5E5E"/>
-                </a:solidFill>
-                <a:latin typeface="Courier"/>
-              </a:rPr>
-              <a:t># R → Python transfer</a:t>
-            </a:r>
-            <a:br/>
-            <a:r>
-              <a:rPr>
-                <a:solidFill>
-                  <a:srgbClr val="003B4F"/>
-                </a:solidFill>
-                <a:latin typeface="Courier"/>
-              </a:rPr>
-              <a:t>  </a:t>
-            </a:r>
-            <a:r>
-              <a:rPr>
-                <a:solidFill>
-                  <a:srgbClr val="4758AB"/>
-                </a:solidFill>
-                <a:latin typeface="Courier"/>
-              </a:rPr>
-              <a:t>rxp_py</a:t>
-            </a:r>
-            <a:r>
-              <a:rPr>
-                <a:solidFill>
-                  <a:srgbClr val="003B4F"/>
-                </a:solidFill>
-                <a:latin typeface="Courier"/>
-              </a:rPr>
-              <a:t>(…),         </a:t>
-            </a:r>
-            <a:r>
-              <a:rPr>
-                <a:solidFill>
-                  <a:srgbClr val="5E5E5E"/>
-                </a:solidFill>
-                <a:latin typeface="Courier"/>
-              </a:rPr>
-              <a:t># Another Python step</a:t>
-            </a:r>
-            <a:br/>
-            <a:r>
-              <a:rPr>
-                <a:solidFill>
-                  <a:srgbClr val="003B4F"/>
-                </a:solidFill>
-                <a:latin typeface="Courier"/>
-              </a:rPr>
-              <a:t>  </a:t>
-            </a:r>
-            <a:r>
-              <a:rPr>
-                <a:solidFill>
-                  <a:srgbClr val="4758AB"/>
-                </a:solidFill>
-                <a:latin typeface="Courier"/>
-              </a:rPr>
-              <a:t>rxp_py2r</a:t>
-            </a:r>
-            <a:r>
-              <a:rPr>
-                <a:solidFill>
-                  <a:srgbClr val="003B4F"/>
-                </a:solidFill>
-                <a:latin typeface="Courier"/>
-              </a:rPr>
-              <a:t>(…),       </a:t>
-            </a:r>
-            <a:r>
-              <a:rPr>
-                <a:solidFill>
-                  <a:srgbClr val="5E5E5E"/>
-                </a:solidFill>
-                <a:latin typeface="Courier"/>
-              </a:rPr>
-              <a:t># Back to R</a:t>
-            </a:r>
-            <a:br/>
-            <a:r>
-              <a:rPr>
-                <a:solidFill>
-                  <a:srgbClr val="003B4F"/>
-                </a:solidFill>
-                <a:latin typeface="Courier"/>
-              </a:rPr>
-              <a:t>  </a:t>
-            </a:r>
-            <a:r>
-              <a:rPr>
-                <a:solidFill>
-                  <a:srgbClr val="4758AB"/>
-                </a:solidFill>
-                <a:latin typeface="Courier"/>
-              </a:rPr>
-              <a:t>rxp_r</a:t>
-            </a:r>
-            <a:r>
-              <a:rPr>
-                <a:solidFill>
-                  <a:srgbClr val="003B4F"/>
-                </a:solidFill>
-                <a:latin typeface="Courier"/>
-              </a:rPr>
-              <a:t>(…)           </a:t>
-            </a:r>
-            <a:r>
-              <a:rPr>
-                <a:solidFill>
-                  <a:srgbClr val="5E5E5E"/>
-                </a:solidFill>
-                <a:latin typeface="Courier"/>
-              </a:rPr>
-              <a:t># Final step</a:t>
-            </a:r>
-            <a:br/>
-            <a:r>
-              <a:rPr>
-                <a:solidFill>
-                  <a:srgbClr val="003B4F"/>
-                </a:solidFill>
-                <a:latin typeface="Courier"/>
-              </a:rPr>
-              <a:t>) </a:t>
-            </a:r>
-            <a:r>
-              <a:rPr>
-                <a:solidFill>
-                  <a:srgbClr val="5E5E5E"/>
-                </a:solidFill>
-                <a:latin typeface="Courier"/>
-              </a:rPr>
-              <a:t>|&gt;</a:t>
-            </a:r>
-            <a:r>
-              <a:rPr>
-                <a:solidFill>
-                  <a:srgbClr val="003B4F"/>
-                </a:solidFill>
-                <a:latin typeface="Courier"/>
-              </a:rPr>
-              <a:t> </a:t>
-            </a:r>
-            <a:r>
-              <a:rPr>
-                <a:solidFill>
-                  <a:srgbClr val="4758AB"/>
-                </a:solidFill>
-                <a:latin typeface="Courier"/>
-              </a:rPr>
-              <a:t>rixpress</a:t>
-            </a:r>
-            <a:r>
-              <a:rPr>
-                <a:solidFill>
-                  <a:srgbClr val="003B4F"/>
-                </a:solidFill>
-                <a:latin typeface="Courier"/>
-              </a:rPr>
-              <a:t>()</a:t>
-            </a:r>
-          </a:p>
-          <a:p>
             <a:pPr lvl="0"/>
             <a:r>
-              <a:rPr/>
-              <a:t>Each step is named and typed (</a:t>
-            </a:r>
-            <a:r>
-              <a:rPr>
-                <a:latin typeface="Courier"/>
-              </a:rPr>
-              <a:t>py</a:t>
-            </a:r>
-            <a:r>
-              <a:rPr/>
-              <a:t>, </a:t>
-            </a:r>
-            <a:r>
-              <a:rPr>
-                <a:latin typeface="Courier"/>
-              </a:rPr>
-              <a:t>r</a:t>
-            </a:r>
-            <a:r>
-              <a:rPr/>
-              <a:t>, </a:t>
-            </a:r>
-            <a:r>
-              <a:rPr>
-                <a:latin typeface="Courier"/>
-              </a:rPr>
-              <a:t>r2py</a:t>
-            </a:r>
-            <a:r>
-              <a:rPr/>
-              <a:t>, etc.)</a:t>
+              <a:rPr>
+                <a:latin typeface="Courier"/>
+              </a:rPr>
+              <a:t>{rix}</a:t>
+            </a:r>
+            <a:r>
+              <a:rPr/>
+              <a:t>: output is a </a:t>
+            </a:r>
+            <a:r>
+              <a:rPr i="1"/>
+              <a:t>shell</a:t>
+            </a:r>
+            <a:r>
+              <a:rPr/>
+              <a:t> that contains required software</a:t>
             </a:r>
           </a:p>
           <a:p>
             <a:pPr lvl="0"/>
             <a:r>
-              <a:rPr/>
-              <a:t>Ability to add files (</a:t>
-            </a:r>
-            <a:r>
-              <a:rPr>
-                <a:latin typeface="Courier"/>
-              </a:rPr>
-              <a:t>functions.R</a:t>
-            </a:r>
-            <a:r>
-              <a:rPr/>
-              <a:t>, images…)</a:t>
+              <a:rPr>
+                <a:latin typeface="Courier"/>
+              </a:rPr>
+              <a:t>{rixpress}</a:t>
+            </a:r>
+            <a:r>
+              <a:rPr/>
+              <a:t>: output is whatever is the output of your pipeline (cleaned dataset, Quarto/Rmd document, model predictions, model parameters/weights, model itself…)</a:t>
             </a:r>
           </a:p>
         </p:txBody>
@@ -5394,7 +5055,7 @@
             </a:pPr>
             <a:r>
               <a:rPr/>
-              <a:t>Transfer with JSON (or other universal format)</a:t>
+              <a:t>rixpress</a:t>
             </a:r>
           </a:p>
         </p:txBody>
@@ -5416,8 +5077,57 @@
           <a:p>
             <a:pPr lvl="0"/>
             <a:r>
-              <a:rPr/>
-              <a:t>Advantage: avoids using </a:t>
+              <a:rPr>
+                <a:latin typeface="Courier"/>
+              </a:rPr>
+              <a:t>{rixpress}</a:t>
+            </a:r>
+            <a:r>
+              <a:rPr/>
+              <a:t> allows chaining processing steps in R </a:t>
+            </a:r>
+            <a:r>
+              <a:rPr b="1"/>
+              <a:t>and</a:t>
+            </a:r>
+            <a:r>
+              <a:rPr/>
+              <a:t> Python</a:t>
+            </a:r>
+          </a:p>
+          <a:p>
+            <a:pPr lvl="0"/>
+            <a:r>
+              <a:rPr/>
+              <a:t>Uses </a:t>
+            </a:r>
+            <a:r>
+              <a:rPr>
+                <a:latin typeface="Courier"/>
+              </a:rPr>
+              <a:t>{rix}</a:t>
+            </a:r>
+            <a:r>
+              <a:rPr/>
+              <a:t> to create a reproducible (via Nix) execution environment for the pipeline</a:t>
+            </a:r>
+          </a:p>
+          <a:p>
+            <a:pPr lvl="0"/>
+            <a:r>
+              <a:rPr/>
+              <a:t>Each pipeline step is a </a:t>
+            </a:r>
+            <a:r>
+              <a:rPr b="1"/>
+              <a:t>Nix derivation</a:t>
+            </a:r>
+          </a:p>
+          <a:p>
+            <a:pPr lvl="0"/>
+            <a:r>
+              <a:rPr/>
+              <a:t>Data transfer: automatic via </a:t>
             </a:r>
             <a:r>
               <a:rPr>
@@ -5425,296 +5135,9 @@
               </a:rPr>
               <a:t>reticulate</a:t>
             </a:r>
-          </a:p>
-          <a:p>
-            <a:pPr lvl="0"/>
-            <a:r>
-              <a:rPr/>
-              <a:t>Add a Python serialization function:</a:t>
-            </a:r>
-          </a:p>
-          <a:p>
-            <a:pPr lvl="0" indent="0" marL="0">
-              <a:buNone/>
-            </a:pPr>
-            <a:r>
-              <a:rPr/>
-              <a:t>. . .</a:t>
-            </a:r>
-          </a:p>
-          <a:p>
-            <a:pPr lvl="0" indent="0">
-              <a:buNone/>
-            </a:pPr>
-            <a:r>
-              <a:rPr b="1">
-                <a:solidFill>
-                  <a:srgbClr val="003B4F"/>
-                </a:solidFill>
-                <a:latin typeface="Courier"/>
-              </a:rPr>
-              <a:t>def</a:t>
-            </a:r>
-            <a:r>
-              <a:rPr>
-                <a:solidFill>
-                  <a:srgbClr val="003B4F"/>
-                </a:solidFill>
-                <a:latin typeface="Courier"/>
-              </a:rPr>
-              <a:t> serialize_to_json(pl_df, path):</a:t>
-            </a:r>
-            <a:br/>
-            <a:r>
-              <a:rPr>
-                <a:solidFill>
-                  <a:srgbClr val="003B4F"/>
-                </a:solidFill>
-                <a:latin typeface="Courier"/>
-              </a:rPr>
-              <a:t>    </a:t>
-            </a:r>
-            <a:r>
-              <a:rPr b="1">
-                <a:solidFill>
-                  <a:srgbClr val="003B4F"/>
-                </a:solidFill>
-                <a:latin typeface="Courier"/>
-              </a:rPr>
-              <a:t>with</a:t>
-            </a:r>
-            <a:r>
-              <a:rPr>
-                <a:solidFill>
-                  <a:srgbClr val="003B4F"/>
-                </a:solidFill>
-                <a:latin typeface="Courier"/>
-              </a:rPr>
-              <a:t> open(path, </a:t>
-            </a:r>
-            <a:r>
-              <a:rPr>
-                <a:solidFill>
-                  <a:srgbClr val="20794D"/>
-                </a:solidFill>
-                <a:latin typeface="Courier"/>
-              </a:rPr>
-              <a:t>'w'</a:t>
-            </a:r>
-            <a:r>
-              <a:rPr>
-                <a:solidFill>
-                  <a:srgbClr val="003B4F"/>
-                </a:solidFill>
-                <a:latin typeface="Courier"/>
-              </a:rPr>
-              <a:t>) </a:t>
-            </a:r>
-            <a:r>
-              <a:rPr>
-                <a:solidFill>
-                  <a:srgbClr val="00769E"/>
-                </a:solidFill>
-                <a:latin typeface="Courier"/>
-              </a:rPr>
-              <a:t>as</a:t>
-            </a:r>
-            <a:r>
-              <a:rPr>
-                <a:solidFill>
-                  <a:srgbClr val="003B4F"/>
-                </a:solidFill>
-                <a:latin typeface="Courier"/>
-              </a:rPr>
-              <a:t> f:</a:t>
-            </a:r>
-            <a:br/>
-            <a:r>
-              <a:rPr>
-                <a:solidFill>
-                  <a:srgbClr val="003B4F"/>
-                </a:solidFill>
-                <a:latin typeface="Courier"/>
-              </a:rPr>
-              <a:t>        f.write(pl_df.write_json())</a:t>
-            </a:r>
-          </a:p>
-          <a:p>
-            <a:pPr lvl="0"/>
-            <a:r>
-              <a:rPr/>
-              <a:t>And on the R side:</a:t>
-            </a:r>
-          </a:p>
-          <a:p>
-            <a:pPr lvl="0" indent="0" marL="0">
-              <a:buNone/>
-            </a:pPr>
-            <a:r>
-              <a:rPr/>
-              <a:t>. . .</a:t>
-            </a:r>
-          </a:p>
-          <a:p>
-            <a:pPr lvl="0" indent="0">
-              <a:buNone/>
-            </a:pPr>
-            <a:r>
-              <a:rPr>
-                <a:solidFill>
-                  <a:srgbClr val="4758AB"/>
-                </a:solidFill>
-                <a:latin typeface="Courier"/>
-              </a:rPr>
-              <a:t>rxp_r</a:t>
-            </a:r>
-            <a:r>
-              <a:rPr>
-                <a:solidFill>
-                  <a:srgbClr val="003B4F"/>
-                </a:solidFill>
-                <a:latin typeface="Courier"/>
-              </a:rPr>
-              <a:t>(</a:t>
-            </a:r>
-            <a:br/>
-            <a:r>
-              <a:rPr>
-                <a:solidFill>
-                  <a:srgbClr val="003B4F"/>
-                </a:solidFill>
-                <a:latin typeface="Courier"/>
-              </a:rPr>
-              <a:t>  </a:t>
-            </a:r>
-            <a:r>
-              <a:rPr>
-                <a:solidFill>
-                  <a:srgbClr val="657422"/>
-                </a:solidFill>
-                <a:latin typeface="Courier"/>
-              </a:rPr>
-              <a:t>name =</a:t>
-            </a:r>
-            <a:r>
-              <a:rPr>
-                <a:solidFill>
-                  <a:srgbClr val="003B4F"/>
-                </a:solidFill>
-                <a:latin typeface="Courier"/>
-              </a:rPr>
-              <a:t> </a:t>
-            </a:r>
-            <a:r>
-              <a:rPr>
-                <a:solidFill>
-                  <a:srgbClr val="20794D"/>
-                </a:solidFill>
-                <a:latin typeface="Courier"/>
-              </a:rPr>
-              <a:t>"x"</a:t>
-            </a:r>
-            <a:r>
-              <a:rPr>
-                <a:solidFill>
-                  <a:srgbClr val="003B4F"/>
-                </a:solidFill>
-                <a:latin typeface="Courier"/>
-              </a:rPr>
-              <a:t>,</a:t>
-            </a:r>
-            <a:br/>
-            <a:r>
-              <a:rPr>
-                <a:solidFill>
-                  <a:srgbClr val="003B4F"/>
-                </a:solidFill>
-                <a:latin typeface="Courier"/>
-              </a:rPr>
-              <a:t>  </a:t>
-            </a:r>
-            <a:r>
-              <a:rPr>
-                <a:solidFill>
-                  <a:srgbClr val="657422"/>
-                </a:solidFill>
-                <a:latin typeface="Courier"/>
-              </a:rPr>
-              <a:t>expr =</a:t>
-            </a:r>
-            <a:r>
-              <a:rPr>
-                <a:solidFill>
-                  <a:srgbClr val="003B4F"/>
-                </a:solidFill>
-                <a:latin typeface="Courier"/>
-              </a:rPr>
-              <a:t> </a:t>
-            </a:r>
-            <a:r>
-              <a:rPr>
-                <a:solidFill>
-                  <a:srgbClr val="4758AB"/>
-                </a:solidFill>
-                <a:latin typeface="Courier"/>
-              </a:rPr>
-              <a:t>my_fun</a:t>
-            </a:r>
-            <a:r>
-              <a:rPr>
-                <a:solidFill>
-                  <a:srgbClr val="003B4F"/>
-                </a:solidFill>
-                <a:latin typeface="Courier"/>
-              </a:rPr>
-              <a:t>(data),</a:t>
-            </a:r>
-            <a:br/>
-            <a:r>
-              <a:rPr>
-                <a:solidFill>
-                  <a:srgbClr val="003B4F"/>
-                </a:solidFill>
-                <a:latin typeface="Courier"/>
-              </a:rPr>
-              <a:t>  </a:t>
-            </a:r>
-            <a:r>
-              <a:rPr>
-                <a:solidFill>
-                  <a:srgbClr val="657422"/>
-                </a:solidFill>
-                <a:latin typeface="Courier"/>
-              </a:rPr>
-              <a:t>unserialize_function =</a:t>
-            </a:r>
-            <a:r>
-              <a:rPr>
-                <a:solidFill>
-                  <a:srgbClr val="003B4F"/>
-                </a:solidFill>
-                <a:latin typeface="Courier"/>
-              </a:rPr>
-              <a:t> </a:t>
-            </a:r>
-            <a:r>
-              <a:rPr>
-                <a:solidFill>
-                  <a:srgbClr val="20794D"/>
-                </a:solidFill>
-                <a:latin typeface="Courier"/>
-              </a:rPr>
-              <a:t>"jsonlite::fromJSON"</a:t>
-            </a:r>
-            <a:br/>
-            <a:r>
-              <a:rPr>
-                <a:solidFill>
-                  <a:srgbClr val="003B4F"/>
-                </a:solidFill>
-                <a:latin typeface="Courier"/>
-              </a:rPr>
-              <a:t>)</a:t>
+            <a:r>
+              <a:rPr/>
+              <a:t> or universal format (CSV, JSON, Parquet…)</a:t>
             </a:r>
           </a:p>
         </p:txBody>
@@ -5761,7 +5184,7 @@
             </a:pPr>
             <a:r>
               <a:rPr/>
-              <a:t>Document generation (Quarto or Rmd)</a:t>
+              <a:t>An example of a polyglot pipeline</a:t>
             </a:r>
           </a:p>
         </p:txBody>
@@ -5781,71 +5204,418 @@
           <a:bodyPr/>
           <a:lstStyle/>
           <a:p>
+            <a:pPr lvl="0" indent="0">
+              <a:buNone/>
+            </a:pPr>
+            <a:r>
+              <a:rPr>
+                <a:solidFill>
+                  <a:srgbClr val="4758AB"/>
+                </a:solidFill>
+                <a:latin typeface="Courier"/>
+              </a:rPr>
+              <a:t>list</a:t>
+            </a:r>
+            <a:r>
+              <a:rPr>
+                <a:solidFill>
+                  <a:srgbClr val="003B4F"/>
+                </a:solidFill>
+                <a:latin typeface="Courier"/>
+              </a:rPr>
+              <a:t>(</a:t>
+            </a:r>
+            <a:br/>
+            <a:r>
+              <a:rPr>
+                <a:solidFill>
+                  <a:srgbClr val="003B4F"/>
+                </a:solidFill>
+                <a:latin typeface="Courier"/>
+              </a:rPr>
+              <a:t>  </a:t>
+            </a:r>
+            <a:r>
+              <a:rPr>
+                <a:solidFill>
+                  <a:srgbClr val="4758AB"/>
+                </a:solidFill>
+                <a:latin typeface="Courier"/>
+              </a:rPr>
+              <a:t>rxp_py_file</a:t>
+            </a:r>
+            <a:r>
+              <a:rPr>
+                <a:solidFill>
+                  <a:srgbClr val="003B4F"/>
+                </a:solidFill>
+                <a:latin typeface="Courier"/>
+              </a:rPr>
+              <a:t>(…),    </a:t>
+            </a:r>
+            <a:r>
+              <a:rPr>
+                <a:solidFill>
+                  <a:srgbClr val="5E5E5E"/>
+                </a:solidFill>
+                <a:latin typeface="Courier"/>
+              </a:rPr>
+              <a:t># Read a CSV with Python</a:t>
+            </a:r>
+            <a:br/>
+            <a:r>
+              <a:rPr>
+                <a:solidFill>
+                  <a:srgbClr val="003B4F"/>
+                </a:solidFill>
+                <a:latin typeface="Courier"/>
+              </a:rPr>
+              <a:t>  </a:t>
+            </a:r>
+            <a:r>
+              <a:rPr>
+                <a:solidFill>
+                  <a:srgbClr val="4758AB"/>
+                </a:solidFill>
+                <a:latin typeface="Courier"/>
+              </a:rPr>
+              <a:t>rxp_py</a:t>
+            </a:r>
+            <a:r>
+              <a:rPr>
+                <a:solidFill>
+                  <a:srgbClr val="003B4F"/>
+                </a:solidFill>
+                <a:latin typeface="Courier"/>
+              </a:rPr>
+              <a:t>(…),         </a:t>
+            </a:r>
+            <a:r>
+              <a:rPr>
+                <a:solidFill>
+                  <a:srgbClr val="5E5E5E"/>
+                </a:solidFill>
+                <a:latin typeface="Courier"/>
+              </a:rPr>
+              <a:t># Filter with Polars</a:t>
+            </a:r>
+            <a:br/>
+            <a:r>
+              <a:rPr>
+                <a:solidFill>
+                  <a:srgbClr val="003B4F"/>
+                </a:solidFill>
+                <a:latin typeface="Courier"/>
+              </a:rPr>
+              <a:t>  </a:t>
+            </a:r>
+            <a:r>
+              <a:rPr>
+                <a:solidFill>
+                  <a:srgbClr val="4758AB"/>
+                </a:solidFill>
+                <a:latin typeface="Courier"/>
+              </a:rPr>
+              <a:t>rxp_py2r</a:t>
+            </a:r>
+            <a:r>
+              <a:rPr>
+                <a:solidFill>
+                  <a:srgbClr val="003B4F"/>
+                </a:solidFill>
+                <a:latin typeface="Courier"/>
+              </a:rPr>
+              <a:t>(…),       </a:t>
+            </a:r>
+            <a:r>
+              <a:rPr>
+                <a:solidFill>
+                  <a:srgbClr val="5E5E5E"/>
+                </a:solidFill>
+                <a:latin typeface="Courier"/>
+              </a:rPr>
+              <a:t># Python → R transfer</a:t>
+            </a:r>
+            <a:br/>
+            <a:r>
+              <a:rPr>
+                <a:solidFill>
+                  <a:srgbClr val="003B4F"/>
+                </a:solidFill>
+                <a:latin typeface="Courier"/>
+              </a:rPr>
+              <a:t>  </a:t>
+            </a:r>
+            <a:r>
+              <a:rPr>
+                <a:solidFill>
+                  <a:srgbClr val="4758AB"/>
+                </a:solidFill>
+                <a:latin typeface="Courier"/>
+              </a:rPr>
+              <a:t>rxp_r</a:t>
+            </a:r>
+            <a:r>
+              <a:rPr>
+                <a:solidFill>
+                  <a:srgbClr val="003B4F"/>
+                </a:solidFill>
+                <a:latin typeface="Courier"/>
+              </a:rPr>
+              <a:t>(…),          </a:t>
+            </a:r>
+            <a:r>
+              <a:rPr>
+                <a:solidFill>
+                  <a:srgbClr val="5E5E5E"/>
+                </a:solidFill>
+                <a:latin typeface="Courier"/>
+              </a:rPr>
+              <a:t># Transformation in R</a:t>
+            </a:r>
+            <a:br/>
+            <a:r>
+              <a:rPr>
+                <a:solidFill>
+                  <a:srgbClr val="003B4F"/>
+                </a:solidFill>
+                <a:latin typeface="Courier"/>
+              </a:rPr>
+              <a:t>  </a:t>
+            </a:r>
+            <a:r>
+              <a:rPr>
+                <a:solidFill>
+                  <a:srgbClr val="4758AB"/>
+                </a:solidFill>
+                <a:latin typeface="Courier"/>
+              </a:rPr>
+              <a:t>rxp_r2py</a:t>
+            </a:r>
+            <a:r>
+              <a:rPr>
+                <a:solidFill>
+                  <a:srgbClr val="003B4F"/>
+                </a:solidFill>
+                <a:latin typeface="Courier"/>
+              </a:rPr>
+              <a:t>(…),       </a:t>
+            </a:r>
+            <a:r>
+              <a:rPr>
+                <a:solidFill>
+                  <a:srgbClr val="5E5E5E"/>
+                </a:solidFill>
+                <a:latin typeface="Courier"/>
+              </a:rPr>
+              <a:t># R → Python transfer</a:t>
+            </a:r>
+            <a:br/>
+            <a:r>
+              <a:rPr>
+                <a:solidFill>
+                  <a:srgbClr val="003B4F"/>
+                </a:solidFill>
+                <a:latin typeface="Courier"/>
+              </a:rPr>
+              <a:t>  </a:t>
+            </a:r>
+            <a:r>
+              <a:rPr>
+                <a:solidFill>
+                  <a:srgbClr val="4758AB"/>
+                </a:solidFill>
+                <a:latin typeface="Courier"/>
+              </a:rPr>
+              <a:t>rxp_py</a:t>
+            </a:r>
+            <a:r>
+              <a:rPr>
+                <a:solidFill>
+                  <a:srgbClr val="003B4F"/>
+                </a:solidFill>
+                <a:latin typeface="Courier"/>
+              </a:rPr>
+              <a:t>(…),         </a:t>
+            </a:r>
+            <a:r>
+              <a:rPr>
+                <a:solidFill>
+                  <a:srgbClr val="5E5E5E"/>
+                </a:solidFill>
+                <a:latin typeface="Courier"/>
+              </a:rPr>
+              <a:t># Another Python step</a:t>
+            </a:r>
+            <a:br/>
+            <a:r>
+              <a:rPr>
+                <a:solidFill>
+                  <a:srgbClr val="003B4F"/>
+                </a:solidFill>
+                <a:latin typeface="Courier"/>
+              </a:rPr>
+              <a:t>  </a:t>
+            </a:r>
+            <a:r>
+              <a:rPr>
+                <a:solidFill>
+                  <a:srgbClr val="4758AB"/>
+                </a:solidFill>
+                <a:latin typeface="Courier"/>
+              </a:rPr>
+              <a:t>rxp_py2r</a:t>
+            </a:r>
+            <a:r>
+              <a:rPr>
+                <a:solidFill>
+                  <a:srgbClr val="003B4F"/>
+                </a:solidFill>
+                <a:latin typeface="Courier"/>
+              </a:rPr>
+              <a:t>(…),       </a:t>
+            </a:r>
+            <a:r>
+              <a:rPr>
+                <a:solidFill>
+                  <a:srgbClr val="5E5E5E"/>
+                </a:solidFill>
+                <a:latin typeface="Courier"/>
+              </a:rPr>
+              <a:t># Back to R</a:t>
+            </a:r>
+            <a:br/>
+            <a:r>
+              <a:rPr>
+                <a:solidFill>
+                  <a:srgbClr val="003B4F"/>
+                </a:solidFill>
+                <a:latin typeface="Courier"/>
+              </a:rPr>
+              <a:t>  </a:t>
+            </a:r>
+            <a:r>
+              <a:rPr>
+                <a:solidFill>
+                  <a:srgbClr val="4758AB"/>
+                </a:solidFill>
+                <a:latin typeface="Courier"/>
+              </a:rPr>
+              <a:t>rxp_r</a:t>
+            </a:r>
+            <a:r>
+              <a:rPr>
+                <a:solidFill>
+                  <a:srgbClr val="003B4F"/>
+                </a:solidFill>
+                <a:latin typeface="Courier"/>
+              </a:rPr>
+              <a:t>(…)           </a:t>
+            </a:r>
+            <a:r>
+              <a:rPr>
+                <a:solidFill>
+                  <a:srgbClr val="5E5E5E"/>
+                </a:solidFill>
+                <a:latin typeface="Courier"/>
+              </a:rPr>
+              <a:t># Final step</a:t>
+            </a:r>
+            <a:br/>
+            <a:r>
+              <a:rPr>
+                <a:solidFill>
+                  <a:srgbClr val="003B4F"/>
+                </a:solidFill>
+                <a:latin typeface="Courier"/>
+              </a:rPr>
+              <a:t>) </a:t>
+            </a:r>
+            <a:r>
+              <a:rPr>
+                <a:solidFill>
+                  <a:srgbClr val="5E5E5E"/>
+                </a:solidFill>
+                <a:latin typeface="Courier"/>
+              </a:rPr>
+              <a:t>|&gt;</a:t>
+            </a:r>
+            <a:r>
+              <a:rPr>
+                <a:solidFill>
+                  <a:srgbClr val="003B4F"/>
+                </a:solidFill>
+                <a:latin typeface="Courier"/>
+              </a:rPr>
+              <a:t> </a:t>
+            </a:r>
+            <a:r>
+              <a:rPr>
+                <a:solidFill>
+                  <a:srgbClr val="4758AB"/>
+                </a:solidFill>
+                <a:latin typeface="Courier"/>
+              </a:rPr>
+              <a:t>rixpress</a:t>
+            </a:r>
+            <a:r>
+              <a:rPr>
+                <a:solidFill>
+                  <a:srgbClr val="003B4F"/>
+                </a:solidFill>
+                <a:latin typeface="Courier"/>
+              </a:rPr>
+              <a:t>()</a:t>
+            </a:r>
+          </a:p>
+          <a:p>
             <a:pPr lvl="0"/>
             <a:r>
               <a:rPr/>
-              <a:t>Easily integrate pipeline output into a </a:t>
-            </a:r>
-            <a:r>
-              <a:rPr>
-                <a:latin typeface="Courier"/>
-              </a:rPr>
-              <a:t>.qmd</a:t>
-            </a:r>
-            <a:r>
-              <a:rPr/>
-              <a:t>:</a:t>
-            </a:r>
-          </a:p>
-          <a:p>
-            <a:pPr lvl="0" indent="0" marL="0">
-              <a:buNone/>
-            </a:pPr>
-            <a:r>
-              <a:rPr/>
-              <a:t>. . .</a:t>
-            </a:r>
-          </a:p>
-          <a:p>
-            <a:pPr lvl="0" indent="0">
-              <a:buNone/>
-            </a:pPr>
-            <a:r>
-              <a:rPr>
-                <a:latin typeface="Courier"/>
-              </a:rPr>
-              <a:t>```r
-rixpress::rxp_read("mtcars_head")
-```</a:t>
-            </a:r>
-          </a:p>
-          <a:p>
-            <a:pPr lvl="0" indent="0" marL="0">
-              <a:buNone/>
-            </a:pPr>
-            <a:r>
-              <a:rPr/>
-              <a:t>. . .</a:t>
+              <a:t>Each step is named and typed (</a:t>
+            </a:r>
+            <a:r>
+              <a:rPr>
+                <a:latin typeface="Courier"/>
+              </a:rPr>
+              <a:t>py</a:t>
+            </a:r>
+            <a:r>
+              <a:rPr/>
+              <a:t>, </a:t>
+            </a:r>
+            <a:r>
+              <a:rPr>
+                <a:latin typeface="Courier"/>
+              </a:rPr>
+              <a:t>r</a:t>
+            </a:r>
+            <a:r>
+              <a:rPr/>
+              <a:t>, </a:t>
+            </a:r>
+            <a:r>
+              <a:rPr>
+                <a:latin typeface="Courier"/>
+              </a:rPr>
+              <a:t>r2py</a:t>
+            </a:r>
+            <a:r>
+              <a:rPr/>
+              <a:t>, etc.)</a:t>
             </a:r>
           </a:p>
           <a:p>
             <a:pPr lvl="0"/>
             <a:r>
               <a:rPr/>
-              <a:t>All created objects can be dynamically loaded into the document</a:t>
-            </a:r>
-          </a:p>
-          <a:p>
-            <a:pPr lvl="0"/>
-            <a:r>
-              <a:rPr/>
-              <a:t>Possible to include additional files (</a:t>
-            </a:r>
-            <a:r>
-              <a:rPr>
-                <a:latin typeface="Courier"/>
-              </a:rPr>
-              <a:t>content.qmd</a:t>
+              <a:t>Ability to add files (</a:t>
+            </a:r>
+            <a:r>
+              <a:rPr>
+                <a:latin typeface="Courier"/>
+              </a:rPr>
+              <a:t>functions.R</a:t>
             </a:r>
             <a:r>
               <a:rPr/>
@@ -5896,7 +5666,7 @@
             </a:pPr>
             <a:r>
               <a:rPr/>
-              <a:t>To learn more:</a:t>
+              <a:t>Defining a derivation (input data)</a:t>
             </a:r>
           </a:p>
         </p:txBody>
@@ -5916,30 +5686,210 @@
           <a:bodyPr/>
           <a:lstStyle/>
           <a:p>
-            <a:pPr lvl="0"/>
-            <a:r>
-              <a:rPr>
-                <a:hlinkClick r:id="rId2"/>
-              </a:rPr>
-              <a:t>Repository GitHub</a:t>
-            </a:r>
-          </a:p>
-          <a:p>
-            <a:pPr lvl="0"/>
-            <a:r>
-              <a:rPr>
-                <a:hlinkClick r:id="rId3"/>
-              </a:rPr>
-              <a:t>Site web</a:t>
-            </a:r>
-          </a:p>
-          <a:p>
-            <a:pPr lvl="0"/>
-            <a:r>
-              <a:rPr>
-                <a:hlinkClick r:id="rId4"/>
-              </a:rPr>
-              <a:t>Repository d’exemples</a:t>
+            <a:pPr lvl="0" indent="0">
+              <a:buNone/>
+            </a:pPr>
+            <a:r>
+              <a:rPr>
+                <a:solidFill>
+                  <a:srgbClr val="4758AB"/>
+                </a:solidFill>
+                <a:latin typeface="Courier"/>
+              </a:rPr>
+              <a:t>rxp_r_file</a:t>
+            </a:r>
+            <a:r>
+              <a:rPr>
+                <a:solidFill>
+                  <a:srgbClr val="003B4F"/>
+                </a:solidFill>
+                <a:latin typeface="Courier"/>
+              </a:rPr>
+              <a:t>(</a:t>
+            </a:r>
+            <a:br/>
+            <a:r>
+              <a:rPr>
+                <a:solidFill>
+                  <a:srgbClr val="003B4F"/>
+                </a:solidFill>
+                <a:latin typeface="Courier"/>
+              </a:rPr>
+              <a:t>  </a:t>
+            </a:r>
+            <a:r>
+              <a:rPr>
+                <a:solidFill>
+                  <a:srgbClr val="657422"/>
+                </a:solidFill>
+                <a:latin typeface="Courier"/>
+              </a:rPr>
+              <a:t>name =</a:t>
+            </a:r>
+            <a:r>
+              <a:rPr>
+                <a:solidFill>
+                  <a:srgbClr val="003B4F"/>
+                </a:solidFill>
+                <a:latin typeface="Courier"/>
+              </a:rPr>
+              <a:t> mtcars,</a:t>
+            </a:r>
+            <a:br/>
+            <a:r>
+              <a:rPr>
+                <a:solidFill>
+                  <a:srgbClr val="003B4F"/>
+                </a:solidFill>
+                <a:latin typeface="Courier"/>
+              </a:rPr>
+              <a:t>  </a:t>
+            </a:r>
+            <a:r>
+              <a:rPr>
+                <a:solidFill>
+                  <a:srgbClr val="657422"/>
+                </a:solidFill>
+                <a:latin typeface="Courier"/>
+              </a:rPr>
+              <a:t>path =</a:t>
+            </a:r>
+            <a:r>
+              <a:rPr>
+                <a:solidFill>
+                  <a:srgbClr val="003B4F"/>
+                </a:solidFill>
+                <a:latin typeface="Courier"/>
+              </a:rPr>
+              <a:t> </a:t>
+            </a:r>
+            <a:r>
+              <a:rPr>
+                <a:solidFill>
+                  <a:srgbClr val="20794D"/>
+                </a:solidFill>
+                <a:latin typeface="Courier"/>
+              </a:rPr>
+              <a:t>'data/mtcars.csv'</a:t>
+            </a:r>
+            <a:r>
+              <a:rPr>
+                <a:solidFill>
+                  <a:srgbClr val="003B4F"/>
+                </a:solidFill>
+                <a:latin typeface="Courier"/>
+              </a:rPr>
+              <a:t>,</a:t>
+            </a:r>
+            <a:br/>
+            <a:r>
+              <a:rPr>
+                <a:solidFill>
+                  <a:srgbClr val="003B4F"/>
+                </a:solidFill>
+                <a:latin typeface="Courier"/>
+              </a:rPr>
+              <a:t>  </a:t>
+            </a:r>
+            <a:r>
+              <a:rPr>
+                <a:solidFill>
+                  <a:srgbClr val="657422"/>
+                </a:solidFill>
+                <a:latin typeface="Courier"/>
+              </a:rPr>
+              <a:t>read_function =</a:t>
+            </a:r>
+            <a:r>
+              <a:rPr>
+                <a:solidFill>
+                  <a:srgbClr val="003B4F"/>
+                </a:solidFill>
+                <a:latin typeface="Courier"/>
+              </a:rPr>
+              <a:t> \(x) (</a:t>
+            </a:r>
+            <a:r>
+              <a:rPr>
+                <a:solidFill>
+                  <a:srgbClr val="4758AB"/>
+                </a:solidFill>
+                <a:latin typeface="Courier"/>
+              </a:rPr>
+              <a:t>read.csv</a:t>
+            </a:r>
+            <a:r>
+              <a:rPr>
+                <a:solidFill>
+                  <a:srgbClr val="003B4F"/>
+                </a:solidFill>
+                <a:latin typeface="Courier"/>
+              </a:rPr>
+              <a:t>(</a:t>
+            </a:r>
+            <a:r>
+              <a:rPr>
+                <a:solidFill>
+                  <a:srgbClr val="657422"/>
+                </a:solidFill>
+                <a:latin typeface="Courier"/>
+              </a:rPr>
+              <a:t>file =</a:t>
+            </a:r>
+            <a:r>
+              <a:rPr>
+                <a:solidFill>
+                  <a:srgbClr val="003B4F"/>
+                </a:solidFill>
+                <a:latin typeface="Courier"/>
+              </a:rPr>
+              <a:t> x, </a:t>
+            </a:r>
+            <a:r>
+              <a:rPr>
+                <a:solidFill>
+                  <a:srgbClr val="657422"/>
+                </a:solidFill>
+                <a:latin typeface="Courier"/>
+              </a:rPr>
+              <a:t>sep =</a:t>
+            </a:r>
+            <a:r>
+              <a:rPr>
+                <a:solidFill>
+                  <a:srgbClr val="003B4F"/>
+                </a:solidFill>
+                <a:latin typeface="Courier"/>
+              </a:rPr>
+              <a:t> </a:t>
+            </a:r>
+            <a:r>
+              <a:rPr>
+                <a:solidFill>
+                  <a:srgbClr val="20794D"/>
+                </a:solidFill>
+                <a:latin typeface="Courier"/>
+              </a:rPr>
+              <a:t>"|"</a:t>
+            </a:r>
+            <a:r>
+              <a:rPr>
+                <a:solidFill>
+                  <a:srgbClr val="003B4F"/>
+                </a:solidFill>
+                <a:latin typeface="Courier"/>
+              </a:rPr>
+              <a:t>))</a:t>
+            </a:r>
+            <a:br/>
+            <a:r>
+              <a:rPr>
+                <a:solidFill>
+                  <a:srgbClr val="003B4F"/>
+                </a:solidFill>
+                <a:latin typeface="Courier"/>
+              </a:rPr>
+              <a:t>)</a:t>
             </a:r>
           </a:p>
         </p:txBody>
@@ -5986,7 +5936,7 @@
             </a:pPr>
             <a:r>
               <a:rPr/>
-              <a:t>Fin</a:t>
+              <a:t>Defining a derivation (some computation)</a:t>
             </a:r>
           </a:p>
         </p:txBody>
@@ -6006,97 +5956,719 @@
           <a:bodyPr/>
           <a:lstStyle/>
           <a:p>
+            <a:pPr lvl="0" indent="0">
+              <a:buNone/>
+            </a:pPr>
+            <a:r>
+              <a:rPr>
+                <a:solidFill>
+                  <a:srgbClr val="4758AB"/>
+                </a:solidFill>
+                <a:latin typeface="Courier"/>
+              </a:rPr>
+              <a:t>rxp_r</a:t>
+            </a:r>
+            <a:r>
+              <a:rPr>
+                <a:solidFill>
+                  <a:srgbClr val="003B4F"/>
+                </a:solidFill>
+                <a:latin typeface="Courier"/>
+              </a:rPr>
+              <a:t>(</a:t>
+            </a:r>
+            <a:br/>
+            <a:r>
+              <a:rPr>
+                <a:solidFill>
+                  <a:srgbClr val="003B4F"/>
+                </a:solidFill>
+                <a:latin typeface="Courier"/>
+              </a:rPr>
+              <a:t>  </a:t>
+            </a:r>
+            <a:r>
+              <a:rPr>
+                <a:solidFill>
+                  <a:srgbClr val="657422"/>
+                </a:solidFill>
+                <a:latin typeface="Courier"/>
+              </a:rPr>
+              <a:t>name =</a:t>
+            </a:r>
+            <a:r>
+              <a:rPr>
+                <a:solidFill>
+                  <a:srgbClr val="003B4F"/>
+                </a:solidFill>
+                <a:latin typeface="Courier"/>
+              </a:rPr>
+              <a:t> filtered_mtcars,</a:t>
+            </a:r>
+            <a:br/>
+            <a:r>
+              <a:rPr>
+                <a:solidFill>
+                  <a:srgbClr val="003B4F"/>
+                </a:solidFill>
+                <a:latin typeface="Courier"/>
+              </a:rPr>
+              <a:t>  </a:t>
+            </a:r>
+            <a:r>
+              <a:rPr>
+                <a:solidFill>
+                  <a:srgbClr val="657422"/>
+                </a:solidFill>
+                <a:latin typeface="Courier"/>
+              </a:rPr>
+              <a:t>expr =</a:t>
+            </a:r>
+            <a:r>
+              <a:rPr>
+                <a:solidFill>
+                  <a:srgbClr val="003B4F"/>
+                </a:solidFill>
+                <a:latin typeface="Courier"/>
+              </a:rPr>
+              <a:t> </a:t>
+            </a:r>
+            <a:r>
+              <a:rPr>
+                <a:solidFill>
+                  <a:srgbClr val="4758AB"/>
+                </a:solidFill>
+                <a:latin typeface="Courier"/>
+              </a:rPr>
+              <a:t>filter</a:t>
+            </a:r>
+            <a:r>
+              <a:rPr>
+                <a:solidFill>
+                  <a:srgbClr val="003B4F"/>
+                </a:solidFill>
+                <a:latin typeface="Courier"/>
+              </a:rPr>
+              <a:t>(mtcars, am </a:t>
+            </a:r>
+            <a:r>
+              <a:rPr>
+                <a:solidFill>
+                  <a:srgbClr val="5E5E5E"/>
+                </a:solidFill>
+                <a:latin typeface="Courier"/>
+              </a:rPr>
+              <a:t>==</a:t>
+            </a:r>
+            <a:r>
+              <a:rPr>
+                <a:solidFill>
+                  <a:srgbClr val="003B4F"/>
+                </a:solidFill>
+                <a:latin typeface="Courier"/>
+              </a:rPr>
+              <a:t> </a:t>
+            </a:r>
+            <a:r>
+              <a:rPr>
+                <a:solidFill>
+                  <a:srgbClr val="AD0000"/>
+                </a:solidFill>
+                <a:latin typeface="Courier"/>
+              </a:rPr>
+              <a:t>1</a:t>
+            </a:r>
+            <a:r>
+              <a:rPr>
+                <a:solidFill>
+                  <a:srgbClr val="003B4F"/>
+                </a:solidFill>
+                <a:latin typeface="Courier"/>
+              </a:rPr>
+              <a:t>)</a:t>
+            </a:r>
+            <a:br/>
+            <a:r>
+              <a:rPr>
+                <a:solidFill>
+                  <a:srgbClr val="003B4F"/>
+                </a:solidFill>
+                <a:latin typeface="Courier"/>
+              </a:rPr>
+              <a:t>)</a:t>
+            </a:r>
+          </a:p>
+        </p:txBody>
+      </p:sp>
+    </p:spTree>
+  </p:cSld>
+</p:sld>
+</file>
+
+<file path=ppt/slides/slide25.xml><?xml version="1.0" encoding="utf-8"?>
+<p:sld xmlns:a="http://schemas.openxmlformats.org/drawingml/2006/main" xmlns:r="http://schemas.openxmlformats.org/officeDocument/2006/relationships" xmlns:p="http://schemas.openxmlformats.org/presentationml/2006/main">
+  <p:cSld>
+    <p:spTree>
+      <p:nvGrpSpPr>
+        <p:cNvPr id="1" name=""/>
+        <p:cNvGrpSpPr/>
+        <p:nvPr/>
+      </p:nvGrpSpPr>
+      <p:grpSpPr>
+        <a:xfrm>
+          <a:off x="0" y="0"/>
+          <a:ext cx="0" cy="0"/>
+          <a:chOff x="0" y="0"/>
+          <a:chExt cx="0" cy="0"/>
+        </a:xfrm>
+      </p:grpSpPr>
+      <p:sp>
+        <p:nvSpPr>
+          <p:cNvPr id="2" name="Title 1"/>
+          <p:cNvSpPr>
+            <a:spLocks noGrp="1"/>
+          </p:cNvSpPr>
+          <p:nvPr>
+            <p:ph type="title"/>
+          </p:nvPr>
+        </p:nvSpPr>
+        <p:spPr/>
+        <p:txBody>
+          <a:bodyPr/>
+          <a:lstStyle/>
+          <a:p>
             <a:pPr lvl="0" indent="0" marL="0">
               <a:buNone/>
             </a:pPr>
             <a:r>
               <a:rPr/>
-              <a:t>If you have questions:</a:t>
-            </a:r>
-          </a:p>
+              <a:t>Typical structure of a rixpress project</a:t>
+            </a:r>
+          </a:p>
+        </p:txBody>
+      </p:sp>
+      <p:sp>
+        <p:nvSpPr>
+          <p:cNvPr id="3" name="Content Placeholder 2"/>
+          <p:cNvSpPr>
+            <a:spLocks noGrp="1"/>
+          </p:cNvSpPr>
+          <p:nvPr>
+            <p:ph idx="1"/>
+          </p:nvPr>
+        </p:nvSpPr>
+        <p:spPr/>
+        <p:txBody>
+          <a:bodyPr/>
+          <a:lstStyle/>
+          <a:p>
+            <a:pPr lvl="0" indent="0">
+              <a:buNone/>
+            </a:pPr>
+            <a:r>
+              <a:rPr>
+                <a:latin typeface="Courier"/>
+              </a:rPr>
+              <a:t>.
+├── data
+│   └── dataset.csv    # input data (can be many files)
+├── functions.py       # user-defined Python functions
+├── functions.R        # user-defined R function
+├── gen-env.R          # rix script to generate execution env
+├── gen-pipeline.R     # rixpress script to generate pipeline
+├── my_paper           # folder containing Quarto doc
+│   ├── section.qmd    # Qmd file
+│   ├── images         # Folder containing images for document
+│   │   └── graph.png  # Image to add to paper
+│   └── main.qmd       # Main Qmd file
+└── Readme.md          # Readme</a:t>
+            </a:r>
+          </a:p>
+        </p:txBody>
+      </p:sp>
+    </p:spTree>
+  </p:cSld>
+</p:sld>
+</file>
+
+<file path=ppt/slides/slide26.xml><?xml version="1.0" encoding="utf-8"?>
+<p:sld xmlns:a="http://schemas.openxmlformats.org/drawingml/2006/main" xmlns:r="http://schemas.openxmlformats.org/officeDocument/2006/relationships" xmlns:p="http://schemas.openxmlformats.org/presentationml/2006/main">
+  <p:cSld>
+    <p:spTree>
+      <p:nvGrpSpPr>
+        <p:cNvPr id="1" name=""/>
+        <p:cNvGrpSpPr/>
+        <p:nvPr/>
+      </p:nvGrpSpPr>
+      <p:grpSpPr>
+        <a:xfrm>
+          <a:off x="0" y="0"/>
+          <a:ext cx="0" cy="0"/>
+          <a:chOff x="0" y="0"/>
+          <a:chExt cx="0" cy="0"/>
+        </a:xfrm>
+      </p:grpSpPr>
+      <p:sp>
+        <p:nvSpPr>
+          <p:cNvPr id="2" name="Title 1"/>
+          <p:cNvSpPr>
+            <a:spLocks noGrp="1"/>
+          </p:cNvSpPr>
+          <p:nvPr>
+            <p:ph type="title"/>
+          </p:nvPr>
+        </p:nvSpPr>
+        <p:spPr/>
+        <p:txBody>
+          <a:bodyPr/>
+          <a:lstStyle/>
+          <a:p>
+            <a:pPr lvl="0" indent="0" marL="0">
+              <a:buNone/>
+            </a:pPr>
+            <a:r>
+              <a:rPr/>
+              <a:t>Defining Quarto or Rmd documents</a:t>
+            </a:r>
+          </a:p>
+        </p:txBody>
+      </p:sp>
+      <p:sp>
+        <p:nvSpPr>
+          <p:cNvPr id="3" name="Content Placeholder 2"/>
+          <p:cNvSpPr>
+            <a:spLocks noGrp="1"/>
+          </p:cNvSpPr>
+          <p:nvPr>
+            <p:ph idx="1"/>
+          </p:nvPr>
+        </p:nvSpPr>
+        <p:spPr/>
+        <p:txBody>
+          <a:bodyPr/>
+          <a:lstStyle/>
+          <a:p>
+            <a:pPr lvl="0" indent="0" marL="0">
+              <a:buNone/>
+            </a:pPr>
+            <a:r>
+              <a:rPr/>
+              <a:t>Use </a:t>
+            </a:r>
+            <a:r>
+              <a:rPr>
+                <a:latin typeface="Courier"/>
+              </a:rPr>
+              <a:t>rxp_read()</a:t>
+            </a:r>
+            <a:r>
+              <a:rPr/>
+              <a:t> to include pipeline outputs:</a:t>
+            </a:r>
+          </a:p>
+          <a:p>
+            <a:pPr lvl="0" indent="0">
+              <a:buNone/>
+            </a:pPr>
+            <a:r>
+              <a:rPr>
+                <a:solidFill>
+                  <a:srgbClr val="003B4F"/>
+                </a:solidFill>
+                <a:latin typeface="Courier"/>
+              </a:rPr>
+              <a:t>rixpress</a:t>
+            </a:r>
+            <a:r>
+              <a:rPr>
+                <a:solidFill>
+                  <a:srgbClr val="5E5E5E"/>
+                </a:solidFill>
+                <a:latin typeface="Courier"/>
+              </a:rPr>
+              <a:t>::</a:t>
+            </a:r>
+            <a:r>
+              <a:rPr>
+                <a:solidFill>
+                  <a:srgbClr val="4758AB"/>
+                </a:solidFill>
+                <a:latin typeface="Courier"/>
+              </a:rPr>
+              <a:t>rxp_read</a:t>
+            </a:r>
+            <a:r>
+              <a:rPr>
+                <a:solidFill>
+                  <a:srgbClr val="003B4F"/>
+                </a:solidFill>
+                <a:latin typeface="Courier"/>
+              </a:rPr>
+              <a:t>(</a:t>
+            </a:r>
+            <a:r>
+              <a:rPr>
+                <a:solidFill>
+                  <a:srgbClr val="20794D"/>
+                </a:solidFill>
+                <a:latin typeface="Courier"/>
+              </a:rPr>
+              <a:t>"mtcars_head"</a:t>
+            </a:r>
+            <a:r>
+              <a:rPr>
+                <a:solidFill>
+                  <a:srgbClr val="003B4F"/>
+                </a:solidFill>
+                <a:latin typeface="Courier"/>
+              </a:rPr>
+              <a:t>)</a:t>
+            </a:r>
+          </a:p>
+          <a:p>
+            <a:pPr lvl="0" indent="0" marL="0">
+              <a:buNone/>
+            </a:pPr>
+            <a:r>
+              <a:rPr/>
+              <a:t>All created objects can be dynamically loaded into the document</a:t>
+            </a:r>
+          </a:p>
+          <a:p>
+            <a:pPr lvl="0" indent="0" marL="0">
+              <a:buNone/>
+            </a:pPr>
+            <a:r>
+              <a:rPr/>
+              <a:t>Possible to include additional files (</a:t>
+            </a:r>
+            <a:r>
+              <a:rPr>
+                <a:latin typeface="Courier"/>
+              </a:rPr>
+              <a:t>content.qmd</a:t>
+            </a:r>
+            <a:r>
+              <a:rPr/>
+              <a:t>, images…)</a:t>
+            </a:r>
+          </a:p>
+        </p:txBody>
+      </p:sp>
+    </p:spTree>
+  </p:cSld>
+</p:sld>
+</file>
+
+<file path=ppt/slides/slide27.xml><?xml version="1.0" encoding="utf-8"?>
+<p:sld xmlns:a="http://schemas.openxmlformats.org/drawingml/2006/main" xmlns:r="http://schemas.openxmlformats.org/officeDocument/2006/relationships" xmlns:p="http://schemas.openxmlformats.org/presentationml/2006/main">
+  <p:cSld>
+    <p:spTree>
+      <p:nvGrpSpPr>
+        <p:cNvPr id="1" name=""/>
+        <p:cNvGrpSpPr/>
+        <p:nvPr/>
+      </p:nvGrpSpPr>
+      <p:grpSpPr>
+        <a:xfrm>
+          <a:off x="0" y="0"/>
+          <a:ext cx="0" cy="0"/>
+          <a:chOff x="0" y="0"/>
+          <a:chExt cx="0" cy="0"/>
+        </a:xfrm>
+      </p:grpSpPr>
+      <p:sp>
+        <p:nvSpPr>
+          <p:cNvPr id="2" name="Title 1"/>
+          <p:cNvSpPr>
+            <a:spLocks noGrp="1"/>
+          </p:cNvSpPr>
+          <p:nvPr>
+            <p:ph type="title"/>
+          </p:nvPr>
+        </p:nvSpPr>
+        <p:spPr/>
+        <p:txBody>
+          <a:bodyPr/>
+          <a:lstStyle/>
+          <a:p>
+            <a:pPr lvl="0" indent="0" marL="0">
+              <a:buNone/>
+            </a:pPr>
+            <a:r>
+              <a:rPr/>
+              <a:t>Using rixpress</a:t>
+            </a:r>
+          </a:p>
+        </p:txBody>
+      </p:sp>
+      <p:sp>
+        <p:nvSpPr>
+          <p:cNvPr id="3" name="Content Placeholder 2"/>
+          <p:cNvSpPr>
+            <a:spLocks noGrp="1"/>
+          </p:cNvSpPr>
+          <p:nvPr>
+            <p:ph idx="1"/>
+          </p:nvPr>
+        </p:nvSpPr>
+        <p:spPr/>
+        <p:txBody>
+          <a:bodyPr/>
+          <a:lstStyle/>
           <a:p>
             <a:pPr lvl="0"/>
             <a:r>
               <a:rPr/>
-              <a:t>bruno@brodrigues.co</a:t>
+              <a:t>Write code in </a:t>
+            </a:r>
+            <a:r>
+              <a:rPr>
+                <a:latin typeface="Courier"/>
+              </a:rPr>
+              <a:t>gen-pipeline.R</a:t>
+            </a:r>
+            <a:r>
+              <a:rPr/>
+              <a:t> and build pipeline using </a:t>
+            </a:r>
+            <a:r>
+              <a:rPr>
+                <a:latin typeface="Courier"/>
+              </a:rPr>
+              <a:t>rxp_make()</a:t>
             </a:r>
           </a:p>
           <a:p>
             <a:pPr lvl="0"/>
             <a:r>
               <a:rPr/>
-              <a:t>Twitter : </a:t>
-            </a:r>
-            <a:r>
-              <a:rPr>
-                <a:hlinkClick r:id="rId2"/>
-              </a:rPr>
-              <a:t>@brodriguesco</a:t>
+              <a:t>Inspect outputs using </a:t>
+            </a:r>
+            <a:r>
+              <a:rPr>
+                <a:latin typeface="Courier"/>
+              </a:rPr>
+              <a:t>rxp_inspect()</a:t>
             </a:r>
           </a:p>
           <a:p>
             <a:pPr lvl="0"/>
             <a:r>
               <a:rPr/>
-              <a:t>Mastodon : </a:t>
-            </a:r>
-            <a:r>
-              <a:rPr>
-                <a:hlinkClick r:id="rId3"/>
-              </a:rPr>
-              <a:t>@brodriguesco@fosstodon.org</a:t>
-            </a:r>
-          </a:p>
+              <a:t>View outputs using </a:t>
+            </a:r>
+            <a:r>
+              <a:rPr>
+                <a:latin typeface="Courier"/>
+              </a:rPr>
+              <a:t>rxp_read()</a:t>
+            </a:r>
+            <a:r>
+              <a:rPr/>
+              <a:t> (load them using </a:t>
+            </a:r>
+            <a:r>
+              <a:rPr>
+                <a:latin typeface="Courier"/>
+              </a:rPr>
+              <a:t>rxp_load()</a:t>
+            </a:r>
+          </a:p>
+        </p:txBody>
+      </p:sp>
+    </p:spTree>
+  </p:cSld>
+</p:sld>
+</file>
+
+<file path=ppt/slides/slide28.xml><?xml version="1.0" encoding="utf-8"?>
+<p:sld xmlns:a="http://schemas.openxmlformats.org/drawingml/2006/main" xmlns:r="http://schemas.openxmlformats.org/officeDocument/2006/relationships" xmlns:p="http://schemas.openxmlformats.org/presentationml/2006/main">
+  <p:cSld>
+    <p:spTree>
+      <p:nvGrpSpPr>
+        <p:cNvPr id="1" name=""/>
+        <p:cNvGrpSpPr/>
+        <p:nvPr/>
+      </p:nvGrpSpPr>
+      <p:grpSpPr>
+        <a:xfrm>
+          <a:off x="0" y="0"/>
+          <a:ext cx="0" cy="0"/>
+          <a:chOff x="0" y="0"/>
+          <a:chExt cx="0" cy="0"/>
+        </a:xfrm>
+      </p:grpSpPr>
+      <p:sp>
+        <p:nvSpPr>
+          <p:cNvPr id="2" name="Title 1"/>
+          <p:cNvSpPr>
+            <a:spLocks noGrp="1"/>
+          </p:cNvSpPr>
+          <p:nvPr>
+            <p:ph type="title"/>
+          </p:nvPr>
+        </p:nvSpPr>
+        <p:spPr/>
+        <p:txBody>
+          <a:bodyPr/>
+          <a:lstStyle/>
+          <a:p>
+            <a:pPr lvl="0" indent="0" marL="0">
+              <a:buNone/>
+            </a:pPr>
+            <a:r>
+              <a:rPr/>
+              <a:t>Transfer with JSON (or other universal format)</a:t>
+            </a:r>
+          </a:p>
+        </p:txBody>
+      </p:sp>
+      <p:sp>
+        <p:nvSpPr>
+          <p:cNvPr id="3" name="Content Placeholder 2"/>
+          <p:cNvSpPr>
+            <a:spLocks noGrp="1"/>
+          </p:cNvSpPr>
+          <p:nvPr>
+            <p:ph idx="1"/>
+          </p:nvPr>
+        </p:nvSpPr>
+        <p:spPr/>
+        <p:txBody>
+          <a:bodyPr/>
+          <a:lstStyle/>
           <a:p>
             <a:pPr lvl="0"/>
             <a:r>
               <a:rPr/>
-              <a:t>Blog : </a:t>
-            </a:r>
-            <a:r>
-              <a:rPr>
-                <a:hlinkClick r:id="rId4"/>
-              </a:rPr>
-              <a:t>www.brodrigues.co</a:t>
+              <a:t>Advantage: avoids using </a:t>
+            </a:r>
+            <a:r>
+              <a:rPr>
+                <a:latin typeface="Courier"/>
+              </a:rPr>
+              <a:t>reticulate</a:t>
             </a:r>
           </a:p>
           <a:p>
             <a:pPr lvl="0"/>
             <a:r>
               <a:rPr/>
-              <a:t>Livre : </a:t>
-            </a:r>
-            <a:r>
-              <a:rPr>
-                <a:hlinkClick r:id="rId5"/>
-              </a:rPr>
-              <a:t>www.raps-with-r.dev</a:t>
+              <a:t>Add a Python serialization function:</a:t>
+            </a:r>
+          </a:p>
+          <a:p>
+            <a:pPr lvl="0" indent="0" marL="0">
+              <a:buNone/>
+            </a:pPr>
+            <a:r>
+              <a:rPr/>
+              <a:t>. . .</a:t>
+            </a:r>
+          </a:p>
+          <a:p>
+            <a:pPr lvl="0" indent="0">
+              <a:buNone/>
+            </a:pPr>
+            <a:r>
+              <a:rPr b="1">
+                <a:solidFill>
+                  <a:srgbClr val="003B4F"/>
+                </a:solidFill>
+                <a:latin typeface="Courier"/>
+              </a:rPr>
+              <a:t>def</a:t>
+            </a:r>
+            <a:r>
+              <a:rPr>
+                <a:solidFill>
+                  <a:srgbClr val="003B4F"/>
+                </a:solidFill>
+                <a:latin typeface="Courier"/>
+              </a:rPr>
+              <a:t> serialize_to_json(pl_df, path):</a:t>
+            </a:r>
+            <a:br/>
+            <a:r>
+              <a:rPr>
+                <a:solidFill>
+                  <a:srgbClr val="003B4F"/>
+                </a:solidFill>
+                <a:latin typeface="Courier"/>
+              </a:rPr>
+              <a:t>    </a:t>
+            </a:r>
+            <a:r>
+              <a:rPr b="1">
+                <a:solidFill>
+                  <a:srgbClr val="003B4F"/>
+                </a:solidFill>
+                <a:latin typeface="Courier"/>
+              </a:rPr>
+              <a:t>with</a:t>
+            </a:r>
+            <a:r>
+              <a:rPr>
+                <a:solidFill>
+                  <a:srgbClr val="003B4F"/>
+                </a:solidFill>
+                <a:latin typeface="Courier"/>
+              </a:rPr>
+              <a:t> open(path, </a:t>
+            </a:r>
+            <a:r>
+              <a:rPr>
+                <a:solidFill>
+                  <a:srgbClr val="20794D"/>
+                </a:solidFill>
+                <a:latin typeface="Courier"/>
+              </a:rPr>
+              <a:t>'w'</a:t>
+            </a:r>
+            <a:r>
+              <a:rPr>
+                <a:solidFill>
+                  <a:srgbClr val="003B4F"/>
+                </a:solidFill>
+                <a:latin typeface="Courier"/>
+              </a:rPr>
+              <a:t>) </a:t>
+            </a:r>
+            <a:r>
+              <a:rPr>
+                <a:solidFill>
+                  <a:srgbClr val="00769E"/>
+                </a:solidFill>
+                <a:latin typeface="Courier"/>
+              </a:rPr>
+              <a:t>as</a:t>
+            </a:r>
+            <a:r>
+              <a:rPr>
+                <a:solidFill>
+                  <a:srgbClr val="003B4F"/>
+                </a:solidFill>
+                <a:latin typeface="Courier"/>
+              </a:rPr>
+              <a:t> f:</a:t>
+            </a:r>
+            <a:br/>
+            <a:r>
+              <a:rPr>
+                <a:solidFill>
+                  <a:srgbClr val="003B4F"/>
+                </a:solidFill>
+                <a:latin typeface="Courier"/>
+              </a:rPr>
+              <a:t>        f.write(pl_df.write_json())</a:t>
             </a:r>
           </a:p>
           <a:p>
             <a:pPr lvl="0"/>
             <a:r>
               <a:rPr/>
-              <a:t>rix : </a:t>
-            </a:r>
-            <a:r>
-              <a:rPr>
-                <a:hlinkClick r:id="rId6"/>
-              </a:rPr>
-              <a:t>https://docs.ropensci.org/rix</a:t>
-            </a:r>
-          </a:p>
-          <a:p>
-            <a:pPr lvl="0"/>
-            <a:r>
-              <a:rPr/>
-              <a:t>rixpress : </a:t>
-            </a:r>
-            <a:r>
-              <a:rPr>
-                <a:hlinkClick r:id="rId7"/>
-              </a:rPr>
-              <a:t>https://b-rodrigues.github.io/rixpress/</a:t>
+              <a:t>And on the R side:</a:t>
             </a:r>
           </a:p>
           <a:p>
@@ -6105,7 +6677,247 @@
             </a:pPr>
             <a:r>
               <a:rPr/>
-              <a:t>Thanks!</a:t>
+              <a:t>. . .</a:t>
+            </a:r>
+          </a:p>
+          <a:p>
+            <a:pPr lvl="0" indent="0">
+              <a:buNone/>
+            </a:pPr>
+            <a:r>
+              <a:rPr>
+                <a:solidFill>
+                  <a:srgbClr val="4758AB"/>
+                </a:solidFill>
+                <a:latin typeface="Courier"/>
+              </a:rPr>
+              <a:t>rxp_r</a:t>
+            </a:r>
+            <a:r>
+              <a:rPr>
+                <a:solidFill>
+                  <a:srgbClr val="003B4F"/>
+                </a:solidFill>
+                <a:latin typeface="Courier"/>
+              </a:rPr>
+              <a:t>(</a:t>
+            </a:r>
+            <a:br/>
+            <a:r>
+              <a:rPr>
+                <a:solidFill>
+                  <a:srgbClr val="003B4F"/>
+                </a:solidFill>
+                <a:latin typeface="Courier"/>
+              </a:rPr>
+              <a:t>  </a:t>
+            </a:r>
+            <a:r>
+              <a:rPr>
+                <a:solidFill>
+                  <a:srgbClr val="657422"/>
+                </a:solidFill>
+                <a:latin typeface="Courier"/>
+              </a:rPr>
+              <a:t>name =</a:t>
+            </a:r>
+            <a:r>
+              <a:rPr>
+                <a:solidFill>
+                  <a:srgbClr val="003B4F"/>
+                </a:solidFill>
+                <a:latin typeface="Courier"/>
+              </a:rPr>
+              <a:t> </a:t>
+            </a:r>
+            <a:r>
+              <a:rPr>
+                <a:solidFill>
+                  <a:srgbClr val="20794D"/>
+                </a:solidFill>
+                <a:latin typeface="Courier"/>
+              </a:rPr>
+              <a:t>"x"</a:t>
+            </a:r>
+            <a:r>
+              <a:rPr>
+                <a:solidFill>
+                  <a:srgbClr val="003B4F"/>
+                </a:solidFill>
+                <a:latin typeface="Courier"/>
+              </a:rPr>
+              <a:t>,</a:t>
+            </a:r>
+            <a:br/>
+            <a:r>
+              <a:rPr>
+                <a:solidFill>
+                  <a:srgbClr val="003B4F"/>
+                </a:solidFill>
+                <a:latin typeface="Courier"/>
+              </a:rPr>
+              <a:t>  </a:t>
+            </a:r>
+            <a:r>
+              <a:rPr>
+                <a:solidFill>
+                  <a:srgbClr val="657422"/>
+                </a:solidFill>
+                <a:latin typeface="Courier"/>
+              </a:rPr>
+              <a:t>expr =</a:t>
+            </a:r>
+            <a:r>
+              <a:rPr>
+                <a:solidFill>
+                  <a:srgbClr val="003B4F"/>
+                </a:solidFill>
+                <a:latin typeface="Courier"/>
+              </a:rPr>
+              <a:t> </a:t>
+            </a:r>
+            <a:r>
+              <a:rPr>
+                <a:solidFill>
+                  <a:srgbClr val="4758AB"/>
+                </a:solidFill>
+                <a:latin typeface="Courier"/>
+              </a:rPr>
+              <a:t>my_fun</a:t>
+            </a:r>
+            <a:r>
+              <a:rPr>
+                <a:solidFill>
+                  <a:srgbClr val="003B4F"/>
+                </a:solidFill>
+                <a:latin typeface="Courier"/>
+              </a:rPr>
+              <a:t>(data),</a:t>
+            </a:r>
+            <a:br/>
+            <a:r>
+              <a:rPr>
+                <a:solidFill>
+                  <a:srgbClr val="003B4F"/>
+                </a:solidFill>
+                <a:latin typeface="Courier"/>
+              </a:rPr>
+              <a:t>  </a:t>
+            </a:r>
+            <a:r>
+              <a:rPr>
+                <a:solidFill>
+                  <a:srgbClr val="657422"/>
+                </a:solidFill>
+                <a:latin typeface="Courier"/>
+              </a:rPr>
+              <a:t>unserialize_function =</a:t>
+            </a:r>
+            <a:r>
+              <a:rPr>
+                <a:solidFill>
+                  <a:srgbClr val="003B4F"/>
+                </a:solidFill>
+                <a:latin typeface="Courier"/>
+              </a:rPr>
+              <a:t> </a:t>
+            </a:r>
+            <a:r>
+              <a:rPr>
+                <a:solidFill>
+                  <a:srgbClr val="20794D"/>
+                </a:solidFill>
+                <a:latin typeface="Courier"/>
+              </a:rPr>
+              <a:t>"jsonlite::fromJSON"</a:t>
+            </a:r>
+            <a:br/>
+            <a:r>
+              <a:rPr>
+                <a:solidFill>
+                  <a:srgbClr val="003B4F"/>
+                </a:solidFill>
+                <a:latin typeface="Courier"/>
+              </a:rPr>
+              <a:t>)</a:t>
+            </a:r>
+          </a:p>
+        </p:txBody>
+      </p:sp>
+    </p:spTree>
+  </p:cSld>
+</p:sld>
+</file>
+
+<file path=ppt/slides/slide29.xml><?xml version="1.0" encoding="utf-8"?>
+<p:sld xmlns:a="http://schemas.openxmlformats.org/drawingml/2006/main" xmlns:r="http://schemas.openxmlformats.org/officeDocument/2006/relationships" xmlns:p="http://schemas.openxmlformats.org/presentationml/2006/main">
+  <p:cSld>
+    <p:spTree>
+      <p:nvGrpSpPr>
+        <p:cNvPr id="1" name=""/>
+        <p:cNvGrpSpPr/>
+        <p:nvPr/>
+      </p:nvGrpSpPr>
+      <p:grpSpPr>
+        <a:xfrm>
+          <a:off x="0" y="0"/>
+          <a:ext cx="0" cy="0"/>
+          <a:chOff x="0" y="0"/>
+          <a:chExt cx="0" cy="0"/>
+        </a:xfrm>
+      </p:grpSpPr>
+      <p:sp>
+        <p:nvSpPr>
+          <p:cNvPr id="2" name="Title 1"/>
+          <p:cNvSpPr>
+            <a:spLocks noGrp="1"/>
+          </p:cNvSpPr>
+          <p:nvPr>
+            <p:ph type="title"/>
+          </p:nvPr>
+        </p:nvSpPr>
+        <p:spPr/>
+        <p:txBody>
+          <a:bodyPr/>
+          <a:lstStyle/>
+          <a:p>
+            <a:pPr lvl="0" indent="0" marL="0">
+              <a:buNone/>
+            </a:pPr>
+            <a:r>
+              <a:rPr/>
+              <a:t>Interactive demo</a:t>
+            </a:r>
+          </a:p>
+        </p:txBody>
+      </p:sp>
+      <p:sp>
+        <p:nvSpPr>
+          <p:cNvPr id="3" name="Content Placeholder 2"/>
+          <p:cNvSpPr>
+            <a:spLocks noGrp="1"/>
+          </p:cNvSpPr>
+          <p:nvPr>
+            <p:ph idx="1"/>
+          </p:nvPr>
+        </p:nvSpPr>
+        <p:spPr/>
+        <p:txBody>
+          <a:bodyPr/>
+          <a:lstStyle/>
+          <a:p>
+            <a:pPr lvl="0" indent="0" marL="0">
+              <a:buNone/>
+            </a:pPr>
+            <a:r>
+              <a:rPr/>
+              <a:t>See </a:t>
+            </a:r>
+            <a:r>
+              <a:rPr>
+                <a:latin typeface="Courier"/>
+              </a:rPr>
+              <a:t>scripts/rixpress_demo</a:t>
             </a:r>
           </a:p>
         </p:txBody>
@@ -6187,6 +6999,262 @@
           </a:ln>
         </p:spPr>
       </p:pic>
+    </p:spTree>
+  </p:cSld>
+</p:sld>
+</file>
+
+<file path=ppt/slides/slide30.xml><?xml version="1.0" encoding="utf-8"?>
+<p:sld xmlns:a="http://schemas.openxmlformats.org/drawingml/2006/main" xmlns:r="http://schemas.openxmlformats.org/officeDocument/2006/relationships" xmlns:p="http://schemas.openxmlformats.org/presentationml/2006/main">
+  <p:cSld>
+    <p:spTree>
+      <p:nvGrpSpPr>
+        <p:cNvPr id="1" name=""/>
+        <p:cNvGrpSpPr/>
+        <p:nvPr/>
+      </p:nvGrpSpPr>
+      <p:grpSpPr>
+        <a:xfrm>
+          <a:off x="0" y="0"/>
+          <a:ext cx="0" cy="0"/>
+          <a:chOff x="0" y="0"/>
+          <a:chExt cx="0" cy="0"/>
+        </a:xfrm>
+      </p:grpSpPr>
+      <p:sp>
+        <p:nvSpPr>
+          <p:cNvPr id="2" name="Title 1"/>
+          <p:cNvSpPr>
+            <a:spLocks noGrp="1"/>
+          </p:cNvSpPr>
+          <p:nvPr>
+            <p:ph type="title"/>
+          </p:nvPr>
+        </p:nvSpPr>
+        <p:spPr/>
+        <p:txBody>
+          <a:bodyPr/>
+          <a:lstStyle/>
+          <a:p>
+            <a:pPr lvl="0" indent="0" marL="0">
+              <a:buNone/>
+            </a:pPr>
+            <a:r>
+              <a:rPr/>
+              <a:t>To learn more:</a:t>
+            </a:r>
+          </a:p>
+        </p:txBody>
+      </p:sp>
+      <p:sp>
+        <p:nvSpPr>
+          <p:cNvPr id="3" name="Content Placeholder 2"/>
+          <p:cNvSpPr>
+            <a:spLocks noGrp="1"/>
+          </p:cNvSpPr>
+          <p:nvPr>
+            <p:ph idx="1"/>
+          </p:nvPr>
+        </p:nvSpPr>
+        <p:spPr/>
+        <p:txBody>
+          <a:bodyPr/>
+          <a:lstStyle/>
+          <a:p>
+            <a:pPr lvl="0"/>
+            <a:r>
+              <a:rPr>
+                <a:hlinkClick r:id="rId2"/>
+              </a:rPr>
+              <a:t>Repository GitHub</a:t>
+            </a:r>
+          </a:p>
+          <a:p>
+            <a:pPr lvl="0"/>
+            <a:r>
+              <a:rPr>
+                <a:hlinkClick r:id="rId3"/>
+              </a:rPr>
+              <a:t>Site web</a:t>
+            </a:r>
+          </a:p>
+          <a:p>
+            <a:pPr lvl="0"/>
+            <a:r>
+              <a:rPr>
+                <a:hlinkClick r:id="rId4"/>
+              </a:rPr>
+              <a:t>Repository d’exemples</a:t>
+            </a:r>
+          </a:p>
+        </p:txBody>
+      </p:sp>
+    </p:spTree>
+  </p:cSld>
+</p:sld>
+</file>
+
+<file path=ppt/slides/slide31.xml><?xml version="1.0" encoding="utf-8"?>
+<p:sld xmlns:a="http://schemas.openxmlformats.org/drawingml/2006/main" xmlns:r="http://schemas.openxmlformats.org/officeDocument/2006/relationships" xmlns:p="http://schemas.openxmlformats.org/presentationml/2006/main">
+  <p:cSld>
+    <p:spTree>
+      <p:nvGrpSpPr>
+        <p:cNvPr id="1" name=""/>
+        <p:cNvGrpSpPr/>
+        <p:nvPr/>
+      </p:nvGrpSpPr>
+      <p:grpSpPr>
+        <a:xfrm>
+          <a:off x="0" y="0"/>
+          <a:ext cx="0" cy="0"/>
+          <a:chOff x="0" y="0"/>
+          <a:chExt cx="0" cy="0"/>
+        </a:xfrm>
+      </p:grpSpPr>
+      <p:sp>
+        <p:nvSpPr>
+          <p:cNvPr id="2" name="Title 1"/>
+          <p:cNvSpPr>
+            <a:spLocks noGrp="1"/>
+          </p:cNvSpPr>
+          <p:nvPr>
+            <p:ph type="title"/>
+          </p:nvPr>
+        </p:nvSpPr>
+        <p:spPr/>
+        <p:txBody>
+          <a:bodyPr/>
+          <a:lstStyle/>
+          <a:p>
+            <a:pPr lvl="0" indent="0" marL="0">
+              <a:buNone/>
+            </a:pPr>
+            <a:r>
+              <a:rPr/>
+              <a:t>Fin</a:t>
+            </a:r>
+          </a:p>
+        </p:txBody>
+      </p:sp>
+      <p:sp>
+        <p:nvSpPr>
+          <p:cNvPr id="3" name="Content Placeholder 2"/>
+          <p:cNvSpPr>
+            <a:spLocks noGrp="1"/>
+          </p:cNvSpPr>
+          <p:nvPr>
+            <p:ph idx="1"/>
+          </p:nvPr>
+        </p:nvSpPr>
+        <p:spPr/>
+        <p:txBody>
+          <a:bodyPr/>
+          <a:lstStyle/>
+          <a:p>
+            <a:pPr lvl="0" indent="0" marL="0">
+              <a:buNone/>
+            </a:pPr>
+            <a:r>
+              <a:rPr/>
+              <a:t>If you have questions:</a:t>
+            </a:r>
+          </a:p>
+          <a:p>
+            <a:pPr lvl="0"/>
+            <a:r>
+              <a:rPr/>
+              <a:t>bruno@brodrigues.co</a:t>
+            </a:r>
+          </a:p>
+          <a:p>
+            <a:pPr lvl="0"/>
+            <a:r>
+              <a:rPr/>
+              <a:t>Twitter : </a:t>
+            </a:r>
+            <a:r>
+              <a:rPr>
+                <a:hlinkClick r:id="rId2"/>
+              </a:rPr>
+              <a:t>@brodriguesco</a:t>
+            </a:r>
+          </a:p>
+          <a:p>
+            <a:pPr lvl="0"/>
+            <a:r>
+              <a:rPr/>
+              <a:t>Mastodon : </a:t>
+            </a:r>
+            <a:r>
+              <a:rPr>
+                <a:hlinkClick r:id="rId3"/>
+              </a:rPr>
+              <a:t>@brodriguesco@fosstodon.org</a:t>
+            </a:r>
+          </a:p>
+          <a:p>
+            <a:pPr lvl="0"/>
+            <a:r>
+              <a:rPr/>
+              <a:t>Blog : </a:t>
+            </a:r>
+            <a:r>
+              <a:rPr>
+                <a:hlinkClick r:id="rId4"/>
+              </a:rPr>
+              <a:t>www.brodrigues.co</a:t>
+            </a:r>
+          </a:p>
+          <a:p>
+            <a:pPr lvl="0"/>
+            <a:r>
+              <a:rPr/>
+              <a:t>Livre : </a:t>
+            </a:r>
+            <a:r>
+              <a:rPr>
+                <a:hlinkClick r:id="rId5"/>
+              </a:rPr>
+              <a:t>www.raps-with-r.dev</a:t>
+            </a:r>
+          </a:p>
+          <a:p>
+            <a:pPr lvl="0"/>
+            <a:r>
+              <a:rPr/>
+              <a:t>rix : </a:t>
+            </a:r>
+            <a:r>
+              <a:rPr>
+                <a:hlinkClick r:id="rId6"/>
+              </a:rPr>
+              <a:t>https://docs.ropensci.org/rix</a:t>
+            </a:r>
+          </a:p>
+          <a:p>
+            <a:pPr lvl="0"/>
+            <a:r>
+              <a:rPr/>
+              <a:t>rixpress : </a:t>
+            </a:r>
+            <a:r>
+              <a:rPr>
+                <a:hlinkClick r:id="rId7"/>
+              </a:rPr>
+              <a:t>https://b-rodrigues.github.io/rixpress/</a:t>
+            </a:r>
+          </a:p>
+          <a:p>
+            <a:pPr lvl="0" indent="0" marL="0">
+              <a:buNone/>
+            </a:pPr>
+            <a:r>
+              <a:rPr/>
+              <a:t>Thanks!</a:t>
+            </a:r>
+          </a:p>
+        </p:txBody>
+      </p:sp>
     </p:spTree>
   </p:cSld>
 </p:sld>

--- a/docs/index.pptx
+++ b/docs/index.pptx
@@ -36,6 +36,7 @@
     <p:sldId id="284" r:id="rId30"/>
     <p:sldId id="285" r:id="rId31"/>
     <p:sldId id="286" r:id="rId32"/>
+    <p:sldId id="287" r:id="rId33"/>
   </p:sldIdLst>
   <p:sldSz cx="9144000" cy="5143500" type="screen16x9"/>
   <p:notesSz cx="6858000" cy="9144000"/>
@@ -6420,6 +6421,74 @@
             <a:pPr lvl="0"/>
             <a:r>
               <a:rPr/>
+              <a:t>Start from an empty folder;</a:t>
+            </a:r>
+          </a:p>
+          <a:p>
+            <a:pPr lvl="0"/>
+            <a:r>
+              <a:rPr/>
+              <a:t>Drop into a temporary shell: </a:t>
+            </a:r>
+            <a:r>
+              <a:rPr>
+                <a:latin typeface="Courier"/>
+              </a:rPr>
+              <a:t>nix-shell --expr "$(curl -sl   https://raw.githubusercontent.com/ropensci/rix/main/inst/extdata/default.nix)"</a:t>
+            </a:r>
+            <a:r>
+              <a:rPr/>
+              <a:t>;</a:t>
+            </a:r>
+          </a:p>
+          <a:p>
+            <a:pPr lvl="0"/>
+            <a:r>
+              <a:rPr/>
+              <a:t>Start project structure using </a:t>
+            </a:r>
+            <a:r>
+              <a:rPr>
+                <a:latin typeface="Courier"/>
+              </a:rPr>
+              <a:t>rixpress::rxp_init()</a:t>
+            </a:r>
+            <a:r>
+              <a:rPr/>
+              <a:t>;</a:t>
+            </a:r>
+          </a:p>
+          <a:p>
+            <a:pPr lvl="0"/>
+            <a:r>
+              <a:rPr/>
+              <a:t>Edit </a:t>
+            </a:r>
+            <a:r>
+              <a:rPr>
+                <a:latin typeface="Courier"/>
+              </a:rPr>
+              <a:t>gen-env.R</a:t>
+            </a:r>
+            <a:r>
+              <a:rPr/>
+              <a:t> and </a:t>
+            </a:r>
+            <a:r>
+              <a:rPr>
+                <a:latin typeface="Courier"/>
+              </a:rPr>
+              <a:t>gen-pipeline.R</a:t>
+            </a:r>
+            <a:r>
+              <a:rPr/>
+              <a:t>;</a:t>
+            </a:r>
+          </a:p>
+          <a:p>
+            <a:pPr lvl="0"/>
+            <a:r>
+              <a:rPr/>
               <a:t>Write code in </a:t>
             </a:r>
             <a:r>
@@ -6438,6 +6507,10 @@
               </a:rPr>
               <a:t>rxp_make()</a:t>
             </a:r>
+            <a:r>
+              <a:rPr/>
+              <a:t>;</a:t>
+            </a:r>
           </a:p>
           <a:p>
             <a:pPr lvl="0"/>
@@ -6451,6 +6524,10 @@
               </a:rPr>
               <a:t>rxp_inspect()</a:t>
             </a:r>
+            <a:r>
+              <a:rPr/>
+              <a:t>;</a:t>
+            </a:r>
           </a:p>
           <a:p>
             <a:pPr lvl="0"/>
@@ -6473,6 +6550,33 @@
                 <a:latin typeface="Courier"/>
               </a:rPr>
               <a:t>rxp_load()</a:t>
+            </a:r>
+            <a:r>
+              <a:rPr/>
+              <a:t>;</a:t>
+            </a:r>
+          </a:p>
+          <a:p>
+            <a:pPr lvl="0"/>
+            <a:r>
+              <a:rPr/>
+              <a:t>View DAG of pipeline using </a:t>
+            </a:r>
+            <a:r>
+              <a:rPr>
+                <a:latin typeface="Courier"/>
+              </a:rPr>
+              <a:t>rxp_ggdag()</a:t>
+            </a:r>
+            <a:r>
+              <a:rPr/>
+              <a:t> or </a:t>
+            </a:r>
+            <a:r>
+              <a:rPr>
+                <a:latin typeface="Courier"/>
+              </a:rPr>
+              <a:t>rxp_visnetwork()</a:t>
             </a:r>
           </a:p>
         </p:txBody>
@@ -6519,7 +6623,7 @@
             </a:pPr>
             <a:r>
               <a:rPr/>
-              <a:t>Transfer with JSON (or other universal format)</a:t>
+              <a:t>Using rixpress</a:t>
             </a:r>
           </a:p>
         </p:txBody>
@@ -6542,304 +6646,68 @@
             <a:pPr lvl="0"/>
             <a:r>
               <a:rPr/>
-              <a:t>Advantage: avoids using </a:t>
-            </a:r>
-            <a:r>
-              <a:rPr>
-                <a:latin typeface="Courier"/>
-              </a:rPr>
-              <a:t>reticulate</a:t>
+              <a:t>Build artifacts get saved and re-used across runs;</a:t>
             </a:r>
           </a:p>
           <a:p>
             <a:pPr lvl="0"/>
             <a:r>
               <a:rPr/>
-              <a:t>Add a Python serialization function:</a:t>
-            </a:r>
-          </a:p>
-          <a:p>
-            <a:pPr lvl="0" indent="0" marL="0">
-              <a:buNone/>
-            </a:pPr>
-            <a:r>
-              <a:rPr/>
-              <a:t>. . .</a:t>
-            </a:r>
-          </a:p>
-          <a:p>
-            <a:pPr lvl="0" indent="0">
-              <a:buNone/>
-            </a:pPr>
-            <a:r>
-              <a:rPr b="1">
-                <a:solidFill>
-                  <a:srgbClr val="003B4F"/>
-                </a:solidFill>
-                <a:latin typeface="Courier"/>
-              </a:rPr>
-              <a:t>def</a:t>
-            </a:r>
-            <a:r>
-              <a:rPr>
-                <a:solidFill>
-                  <a:srgbClr val="003B4F"/>
-                </a:solidFill>
-                <a:latin typeface="Courier"/>
-              </a:rPr>
-              <a:t> serialize_to_json(pl_df, path):</a:t>
-            </a:r>
-            <a:br/>
-            <a:r>
-              <a:rPr>
-                <a:solidFill>
-                  <a:srgbClr val="003B4F"/>
-                </a:solidFill>
-                <a:latin typeface="Courier"/>
-              </a:rPr>
-              <a:t>    </a:t>
-            </a:r>
-            <a:r>
-              <a:rPr b="1">
-                <a:solidFill>
-                  <a:srgbClr val="003B4F"/>
-                </a:solidFill>
-                <a:latin typeface="Courier"/>
-              </a:rPr>
-              <a:t>with</a:t>
-            </a:r>
-            <a:r>
-              <a:rPr>
-                <a:solidFill>
-                  <a:srgbClr val="003B4F"/>
-                </a:solidFill>
-                <a:latin typeface="Courier"/>
-              </a:rPr>
-              <a:t> open(path, </a:t>
-            </a:r>
-            <a:r>
-              <a:rPr>
-                <a:solidFill>
-                  <a:srgbClr val="20794D"/>
-                </a:solidFill>
-                <a:latin typeface="Courier"/>
-              </a:rPr>
-              <a:t>'w'</a:t>
-            </a:r>
-            <a:r>
-              <a:rPr>
-                <a:solidFill>
-                  <a:srgbClr val="003B4F"/>
-                </a:solidFill>
-                <a:latin typeface="Courier"/>
-              </a:rPr>
-              <a:t>) </a:t>
-            </a:r>
-            <a:r>
-              <a:rPr>
-                <a:solidFill>
-                  <a:srgbClr val="00769E"/>
-                </a:solidFill>
-                <a:latin typeface="Courier"/>
-              </a:rPr>
-              <a:t>as</a:t>
-            </a:r>
-            <a:r>
-              <a:rPr>
-                <a:solidFill>
-                  <a:srgbClr val="003B4F"/>
-                </a:solidFill>
-                <a:latin typeface="Courier"/>
-              </a:rPr>
-              <a:t> f:</a:t>
-            </a:r>
-            <a:br/>
-            <a:r>
-              <a:rPr>
-                <a:solidFill>
-                  <a:srgbClr val="003B4F"/>
-                </a:solidFill>
-                <a:latin typeface="Courier"/>
-              </a:rPr>
-              <a:t>        f.write(pl_df.write_json())</a:t>
+              <a:t>Possible to export and import them using </a:t>
+            </a:r>
+            <a:r>
+              <a:rPr>
+                <a:latin typeface="Courier"/>
+              </a:rPr>
+              <a:t>import_nix_archive()</a:t>
+            </a:r>
+            <a:r>
+              <a:rPr/>
+              <a:t> and </a:t>
+            </a:r>
+            <a:r>
+              <a:rPr>
+                <a:latin typeface="Courier"/>
+              </a:rPr>
+              <a:t>export_nix_archive()</a:t>
+            </a:r>
+            <a:r>
+              <a:rPr/>
+              <a:t> (very useful on CI!);</a:t>
             </a:r>
           </a:p>
           <a:p>
             <a:pPr lvl="0"/>
             <a:r>
               <a:rPr/>
-              <a:t>And on the R side:</a:t>
-            </a:r>
-          </a:p>
-          <a:p>
-            <a:pPr lvl="0" indent="0" marL="0">
-              <a:buNone/>
-            </a:pPr>
-            <a:r>
-              <a:rPr/>
-              <a:t>. . .</a:t>
-            </a:r>
-          </a:p>
-          <a:p>
-            <a:pPr lvl="0" indent="0">
-              <a:buNone/>
-            </a:pPr>
-            <a:r>
-              <a:rPr>
-                <a:solidFill>
-                  <a:srgbClr val="4758AB"/>
-                </a:solidFill>
-                <a:latin typeface="Courier"/>
-              </a:rPr>
-              <a:t>rxp_r</a:t>
-            </a:r>
-            <a:r>
-              <a:rPr>
-                <a:solidFill>
-                  <a:srgbClr val="003B4F"/>
-                </a:solidFill>
-                <a:latin typeface="Courier"/>
-              </a:rPr>
-              <a:t>(</a:t>
-            </a:r>
-            <a:br/>
-            <a:r>
-              <a:rPr>
-                <a:solidFill>
-                  <a:srgbClr val="003B4F"/>
-                </a:solidFill>
-                <a:latin typeface="Courier"/>
-              </a:rPr>
-              <a:t>  </a:t>
-            </a:r>
-            <a:r>
-              <a:rPr>
-                <a:solidFill>
-                  <a:srgbClr val="657422"/>
-                </a:solidFill>
-                <a:latin typeface="Courier"/>
-              </a:rPr>
-              <a:t>name =</a:t>
-            </a:r>
-            <a:r>
-              <a:rPr>
-                <a:solidFill>
-                  <a:srgbClr val="003B4F"/>
-                </a:solidFill>
-                <a:latin typeface="Courier"/>
-              </a:rPr>
-              <a:t> </a:t>
-            </a:r>
-            <a:r>
-              <a:rPr>
-                <a:solidFill>
-                  <a:srgbClr val="20794D"/>
-                </a:solidFill>
-                <a:latin typeface="Courier"/>
-              </a:rPr>
-              <a:t>"x"</a:t>
-            </a:r>
-            <a:r>
-              <a:rPr>
-                <a:solidFill>
-                  <a:srgbClr val="003B4F"/>
-                </a:solidFill>
-                <a:latin typeface="Courier"/>
-              </a:rPr>
-              <a:t>,</a:t>
-            </a:r>
-            <a:br/>
-            <a:r>
-              <a:rPr>
-                <a:solidFill>
-                  <a:srgbClr val="003B4F"/>
-                </a:solidFill>
-                <a:latin typeface="Courier"/>
-              </a:rPr>
-              <a:t>  </a:t>
-            </a:r>
-            <a:r>
-              <a:rPr>
-                <a:solidFill>
-                  <a:srgbClr val="657422"/>
-                </a:solidFill>
-                <a:latin typeface="Courier"/>
-              </a:rPr>
-              <a:t>expr =</a:t>
-            </a:r>
-            <a:r>
-              <a:rPr>
-                <a:solidFill>
-                  <a:srgbClr val="003B4F"/>
-                </a:solidFill>
-                <a:latin typeface="Courier"/>
-              </a:rPr>
-              <a:t> </a:t>
-            </a:r>
-            <a:r>
-              <a:rPr>
-                <a:solidFill>
-                  <a:srgbClr val="4758AB"/>
-                </a:solidFill>
-                <a:latin typeface="Courier"/>
-              </a:rPr>
-              <a:t>my_fun</a:t>
-            </a:r>
-            <a:r>
-              <a:rPr>
-                <a:solidFill>
-                  <a:srgbClr val="003B4F"/>
-                </a:solidFill>
-                <a:latin typeface="Courier"/>
-              </a:rPr>
-              <a:t>(data),</a:t>
-            </a:r>
-            <a:br/>
-            <a:r>
-              <a:rPr>
-                <a:solidFill>
-                  <a:srgbClr val="003B4F"/>
-                </a:solidFill>
-                <a:latin typeface="Courier"/>
-              </a:rPr>
-              <a:t>  </a:t>
-            </a:r>
-            <a:r>
-              <a:rPr>
-                <a:solidFill>
-                  <a:srgbClr val="657422"/>
-                </a:solidFill>
-                <a:latin typeface="Courier"/>
-              </a:rPr>
-              <a:t>unserialize_function =</a:t>
-            </a:r>
-            <a:r>
-              <a:rPr>
-                <a:solidFill>
-                  <a:srgbClr val="003B4F"/>
-                </a:solidFill>
-                <a:latin typeface="Courier"/>
-              </a:rPr>
-              <a:t> </a:t>
-            </a:r>
-            <a:r>
-              <a:rPr>
-                <a:solidFill>
-                  <a:srgbClr val="20794D"/>
-                </a:solidFill>
-                <a:latin typeface="Courier"/>
-              </a:rPr>
-              <a:t>"jsonlite::fromJSON"</a:t>
-            </a:r>
-            <a:br/>
-            <a:r>
-              <a:rPr>
-                <a:solidFill>
-                  <a:srgbClr val="003B4F"/>
-                </a:solidFill>
-                <a:latin typeface="Courier"/>
-              </a:rPr>
-              <a:t>)</a:t>
+              <a:t>To set up GitHub Actions use </a:t>
+            </a:r>
+            <a:r>
+              <a:rPr>
+                <a:latin typeface="Courier"/>
+              </a:rPr>
+              <a:t>rxp_ga()</a:t>
+            </a:r>
+            <a:r>
+              <a:rPr/>
+              <a:t>;</a:t>
+            </a:r>
+          </a:p>
+          <a:p>
+            <a:pPr lvl="0"/>
+            <a:r>
+              <a:rPr/>
+              <a:t>Logs of runs get saved, and possible to reload older versions of build artifacts (see </a:t>
+            </a:r>
+            <a:r>
+              <a:rPr>
+                <a:hlinkClick r:id="rId2"/>
+              </a:rPr>
+              <a:t>vignette</a:t>
+            </a:r>
+            <a:r>
+              <a:rPr/>
+              <a:t>).</a:t>
             </a:r>
           </a:p>
         </p:txBody>
@@ -6886,7 +6754,7 @@
             </a:pPr>
             <a:r>
               <a:rPr/>
-              <a:t>Interactive demo</a:t>
+              <a:t>Transfer with JSON (or other universal format)</a:t>
             </a:r>
           </a:p>
         </p:txBody>
@@ -6906,18 +6774,307 @@
           <a:bodyPr/>
           <a:lstStyle/>
           <a:p>
+            <a:pPr lvl="0"/>
+            <a:r>
+              <a:rPr/>
+              <a:t>Advantage: avoids using </a:t>
+            </a:r>
+            <a:r>
+              <a:rPr>
+                <a:latin typeface="Courier"/>
+              </a:rPr>
+              <a:t>reticulate</a:t>
+            </a:r>
+          </a:p>
+          <a:p>
+            <a:pPr lvl="0"/>
+            <a:r>
+              <a:rPr/>
+              <a:t>Add a Python serialization function:</a:t>
+            </a:r>
+          </a:p>
+          <a:p>
             <a:pPr lvl="0" indent="0" marL="0">
               <a:buNone/>
             </a:pPr>
             <a:r>
               <a:rPr/>
-              <a:t>See </a:t>
-            </a:r>
-            <a:r>
-              <a:rPr>
-                <a:latin typeface="Courier"/>
-              </a:rPr>
-              <a:t>scripts/rixpress_demo</a:t>
+              <a:t>. . .</a:t>
+            </a:r>
+          </a:p>
+          <a:p>
+            <a:pPr lvl="0" indent="0">
+              <a:buNone/>
+            </a:pPr>
+            <a:r>
+              <a:rPr b="1">
+                <a:solidFill>
+                  <a:srgbClr val="003B4F"/>
+                </a:solidFill>
+                <a:latin typeface="Courier"/>
+              </a:rPr>
+              <a:t>def</a:t>
+            </a:r>
+            <a:r>
+              <a:rPr>
+                <a:solidFill>
+                  <a:srgbClr val="003B4F"/>
+                </a:solidFill>
+                <a:latin typeface="Courier"/>
+              </a:rPr>
+              <a:t> serialize_to_json(pl_df, path):</a:t>
+            </a:r>
+            <a:br/>
+            <a:r>
+              <a:rPr>
+                <a:solidFill>
+                  <a:srgbClr val="003B4F"/>
+                </a:solidFill>
+                <a:latin typeface="Courier"/>
+              </a:rPr>
+              <a:t>    </a:t>
+            </a:r>
+            <a:r>
+              <a:rPr b="1">
+                <a:solidFill>
+                  <a:srgbClr val="003B4F"/>
+                </a:solidFill>
+                <a:latin typeface="Courier"/>
+              </a:rPr>
+              <a:t>with</a:t>
+            </a:r>
+            <a:r>
+              <a:rPr>
+                <a:solidFill>
+                  <a:srgbClr val="003B4F"/>
+                </a:solidFill>
+                <a:latin typeface="Courier"/>
+              </a:rPr>
+              <a:t> open(path, </a:t>
+            </a:r>
+            <a:r>
+              <a:rPr>
+                <a:solidFill>
+                  <a:srgbClr val="20794D"/>
+                </a:solidFill>
+                <a:latin typeface="Courier"/>
+              </a:rPr>
+              <a:t>'w'</a:t>
+            </a:r>
+            <a:r>
+              <a:rPr>
+                <a:solidFill>
+                  <a:srgbClr val="003B4F"/>
+                </a:solidFill>
+                <a:latin typeface="Courier"/>
+              </a:rPr>
+              <a:t>) </a:t>
+            </a:r>
+            <a:r>
+              <a:rPr>
+                <a:solidFill>
+                  <a:srgbClr val="00769E"/>
+                </a:solidFill>
+                <a:latin typeface="Courier"/>
+              </a:rPr>
+              <a:t>as</a:t>
+            </a:r>
+            <a:r>
+              <a:rPr>
+                <a:solidFill>
+                  <a:srgbClr val="003B4F"/>
+                </a:solidFill>
+                <a:latin typeface="Courier"/>
+              </a:rPr>
+              <a:t> f:</a:t>
+            </a:r>
+            <a:br/>
+            <a:r>
+              <a:rPr>
+                <a:solidFill>
+                  <a:srgbClr val="003B4F"/>
+                </a:solidFill>
+                <a:latin typeface="Courier"/>
+              </a:rPr>
+              <a:t>        f.write(pl_df.write_json())</a:t>
+            </a:r>
+          </a:p>
+          <a:p>
+            <a:pPr lvl="0"/>
+            <a:r>
+              <a:rPr/>
+              <a:t>And on the R side:</a:t>
+            </a:r>
+          </a:p>
+          <a:p>
+            <a:pPr lvl="0" indent="0" marL="0">
+              <a:buNone/>
+            </a:pPr>
+            <a:r>
+              <a:rPr/>
+              <a:t>. . .</a:t>
+            </a:r>
+          </a:p>
+          <a:p>
+            <a:pPr lvl="0" indent="0">
+              <a:buNone/>
+            </a:pPr>
+            <a:r>
+              <a:rPr>
+                <a:solidFill>
+                  <a:srgbClr val="4758AB"/>
+                </a:solidFill>
+                <a:latin typeface="Courier"/>
+              </a:rPr>
+              <a:t>rxp_r</a:t>
+            </a:r>
+            <a:r>
+              <a:rPr>
+                <a:solidFill>
+                  <a:srgbClr val="003B4F"/>
+                </a:solidFill>
+                <a:latin typeface="Courier"/>
+              </a:rPr>
+              <a:t>(</a:t>
+            </a:r>
+            <a:br/>
+            <a:r>
+              <a:rPr>
+                <a:solidFill>
+                  <a:srgbClr val="003B4F"/>
+                </a:solidFill>
+                <a:latin typeface="Courier"/>
+              </a:rPr>
+              <a:t>  </a:t>
+            </a:r>
+            <a:r>
+              <a:rPr>
+                <a:solidFill>
+                  <a:srgbClr val="657422"/>
+                </a:solidFill>
+                <a:latin typeface="Courier"/>
+              </a:rPr>
+              <a:t>name =</a:t>
+            </a:r>
+            <a:r>
+              <a:rPr>
+                <a:solidFill>
+                  <a:srgbClr val="003B4F"/>
+                </a:solidFill>
+                <a:latin typeface="Courier"/>
+              </a:rPr>
+              <a:t> </a:t>
+            </a:r>
+            <a:r>
+              <a:rPr>
+                <a:solidFill>
+                  <a:srgbClr val="20794D"/>
+                </a:solidFill>
+                <a:latin typeface="Courier"/>
+              </a:rPr>
+              <a:t>"x"</a:t>
+            </a:r>
+            <a:r>
+              <a:rPr>
+                <a:solidFill>
+                  <a:srgbClr val="003B4F"/>
+                </a:solidFill>
+                <a:latin typeface="Courier"/>
+              </a:rPr>
+              <a:t>,</a:t>
+            </a:r>
+            <a:br/>
+            <a:r>
+              <a:rPr>
+                <a:solidFill>
+                  <a:srgbClr val="003B4F"/>
+                </a:solidFill>
+                <a:latin typeface="Courier"/>
+              </a:rPr>
+              <a:t>  </a:t>
+            </a:r>
+            <a:r>
+              <a:rPr>
+                <a:solidFill>
+                  <a:srgbClr val="657422"/>
+                </a:solidFill>
+                <a:latin typeface="Courier"/>
+              </a:rPr>
+              <a:t>expr =</a:t>
+            </a:r>
+            <a:r>
+              <a:rPr>
+                <a:solidFill>
+                  <a:srgbClr val="003B4F"/>
+                </a:solidFill>
+                <a:latin typeface="Courier"/>
+              </a:rPr>
+              <a:t> </a:t>
+            </a:r>
+            <a:r>
+              <a:rPr>
+                <a:solidFill>
+                  <a:srgbClr val="4758AB"/>
+                </a:solidFill>
+                <a:latin typeface="Courier"/>
+              </a:rPr>
+              <a:t>my_fun</a:t>
+            </a:r>
+            <a:r>
+              <a:rPr>
+                <a:solidFill>
+                  <a:srgbClr val="003B4F"/>
+                </a:solidFill>
+                <a:latin typeface="Courier"/>
+              </a:rPr>
+              <a:t>(data),</a:t>
+            </a:r>
+            <a:br/>
+            <a:r>
+              <a:rPr>
+                <a:solidFill>
+                  <a:srgbClr val="003B4F"/>
+                </a:solidFill>
+                <a:latin typeface="Courier"/>
+              </a:rPr>
+              <a:t>  </a:t>
+            </a:r>
+            <a:r>
+              <a:rPr>
+                <a:solidFill>
+                  <a:srgbClr val="657422"/>
+                </a:solidFill>
+                <a:latin typeface="Courier"/>
+              </a:rPr>
+              <a:t>unserialize_function =</a:t>
+            </a:r>
+            <a:r>
+              <a:rPr>
+                <a:solidFill>
+                  <a:srgbClr val="003B4F"/>
+                </a:solidFill>
+                <a:latin typeface="Courier"/>
+              </a:rPr>
+              <a:t> </a:t>
+            </a:r>
+            <a:r>
+              <a:rPr>
+                <a:solidFill>
+                  <a:srgbClr val="20794D"/>
+                </a:solidFill>
+                <a:latin typeface="Courier"/>
+              </a:rPr>
+              <a:t>"jsonlite::fromJSON"</a:t>
+            </a:r>
+            <a:br/>
+            <a:r>
+              <a:rPr>
+                <a:solidFill>
+                  <a:srgbClr val="003B4F"/>
+                </a:solidFill>
+                <a:latin typeface="Courier"/>
+              </a:rPr>
+              <a:t>)</a:t>
             </a:r>
           </a:p>
         </p:txBody>
@@ -7041,7 +7198,7 @@
             </a:pPr>
             <a:r>
               <a:rPr/>
-              <a:t>To learn more:</a:t>
+              <a:t>Interactive demo</a:t>
             </a:r>
           </a:p>
         </p:txBody>
@@ -7061,30 +7218,18 @@
           <a:bodyPr/>
           <a:lstStyle/>
           <a:p>
-            <a:pPr lvl="0"/>
-            <a:r>
-              <a:rPr>
-                <a:hlinkClick r:id="rId2"/>
-              </a:rPr>
-              <a:t>Repository GitHub</a:t>
-            </a:r>
-          </a:p>
-          <a:p>
-            <a:pPr lvl="0"/>
-            <a:r>
-              <a:rPr>
-                <a:hlinkClick r:id="rId3"/>
-              </a:rPr>
-              <a:t>Site web</a:t>
-            </a:r>
-          </a:p>
-          <a:p>
-            <a:pPr lvl="0"/>
-            <a:r>
-              <a:rPr>
-                <a:hlinkClick r:id="rId4"/>
-              </a:rPr>
-              <a:t>Repository d’exemples</a:t>
+            <a:pPr lvl="0" indent="0" marL="0">
+              <a:buNone/>
+            </a:pPr>
+            <a:r>
+              <a:rPr/>
+              <a:t>See </a:t>
+            </a:r>
+            <a:r>
+              <a:rPr>
+                <a:latin typeface="Courier"/>
+              </a:rPr>
+              <a:t>scripts/rixpress_demo</a:t>
             </a:r>
           </a:p>
         </p:txBody>
@@ -7131,6 +7276,96 @@
             </a:pPr>
             <a:r>
               <a:rPr/>
+              <a:t>To learn more:</a:t>
+            </a:r>
+          </a:p>
+        </p:txBody>
+      </p:sp>
+      <p:sp>
+        <p:nvSpPr>
+          <p:cNvPr id="3" name="Content Placeholder 2"/>
+          <p:cNvSpPr>
+            <a:spLocks noGrp="1"/>
+          </p:cNvSpPr>
+          <p:nvPr>
+            <p:ph idx="1"/>
+          </p:nvPr>
+        </p:nvSpPr>
+        <p:spPr/>
+        <p:txBody>
+          <a:bodyPr/>
+          <a:lstStyle/>
+          <a:p>
+            <a:pPr lvl="0"/>
+            <a:r>
+              <a:rPr>
+                <a:hlinkClick r:id="rId2"/>
+              </a:rPr>
+              <a:t>Repository GitHub</a:t>
+            </a:r>
+          </a:p>
+          <a:p>
+            <a:pPr lvl="0"/>
+            <a:r>
+              <a:rPr>
+                <a:hlinkClick r:id="rId3"/>
+              </a:rPr>
+              <a:t>Website</a:t>
+            </a:r>
+          </a:p>
+          <a:p>
+            <a:pPr lvl="0"/>
+            <a:r>
+              <a:rPr>
+                <a:hlinkClick r:id="rId4"/>
+              </a:rPr>
+              <a:t>Repository of demos</a:t>
+            </a:r>
+          </a:p>
+        </p:txBody>
+      </p:sp>
+    </p:spTree>
+  </p:cSld>
+</p:sld>
+</file>
+
+<file path=ppt/slides/slide32.xml><?xml version="1.0" encoding="utf-8"?>
+<p:sld xmlns:a="http://schemas.openxmlformats.org/drawingml/2006/main" xmlns:r="http://schemas.openxmlformats.org/officeDocument/2006/relationships" xmlns:p="http://schemas.openxmlformats.org/presentationml/2006/main">
+  <p:cSld>
+    <p:spTree>
+      <p:nvGrpSpPr>
+        <p:cNvPr id="1" name=""/>
+        <p:cNvGrpSpPr/>
+        <p:nvPr/>
+      </p:nvGrpSpPr>
+      <p:grpSpPr>
+        <a:xfrm>
+          <a:off x="0" y="0"/>
+          <a:ext cx="0" cy="0"/>
+          <a:chOff x="0" y="0"/>
+          <a:chExt cx="0" cy="0"/>
+        </a:xfrm>
+      </p:grpSpPr>
+      <p:sp>
+        <p:nvSpPr>
+          <p:cNvPr id="2" name="Title 1"/>
+          <p:cNvSpPr>
+            <a:spLocks noGrp="1"/>
+          </p:cNvSpPr>
+          <p:nvPr>
+            <p:ph type="title"/>
+          </p:nvPr>
+        </p:nvSpPr>
+        <p:spPr/>
+        <p:txBody>
+          <a:bodyPr/>
+          <a:lstStyle/>
+          <a:p>
+            <a:pPr lvl="0" indent="0" marL="0">
+              <a:buNone/>
+            </a:pPr>
+            <a:r>
+              <a:rPr/>
               <a:t>Fin</a:t>
             </a:r>
           </a:p>
@@ -7170,7 +7405,7 @@
             <a:pPr lvl="0"/>
             <a:r>
               <a:rPr/>
-              <a:t>Twitter : </a:t>
+              <a:t>Twitter: </a:t>
             </a:r>
             <a:r>
               <a:rPr>
@@ -7183,7 +7418,7 @@
             <a:pPr lvl="0"/>
             <a:r>
               <a:rPr/>
-              <a:t>Mastodon : </a:t>
+              <a:t>Mastodon: </a:t>
             </a:r>
             <a:r>
               <a:rPr>
@@ -7196,7 +7431,7 @@
             <a:pPr lvl="0"/>
             <a:r>
               <a:rPr/>
-              <a:t>Blog : </a:t>
+              <a:t>Blog: </a:t>
             </a:r>
             <a:r>
               <a:rPr>
@@ -7209,7 +7444,7 @@
             <a:pPr lvl="0"/>
             <a:r>
               <a:rPr/>
-              <a:t>Livre : </a:t>
+              <a:t>Book: </a:t>
             </a:r>
             <a:r>
               <a:rPr>
@@ -7222,7 +7457,7 @@
             <a:pPr lvl="0"/>
             <a:r>
               <a:rPr/>
-              <a:t>rix : </a:t>
+              <a:t>rix: </a:t>
             </a:r>
             <a:r>
               <a:rPr>
@@ -7235,7 +7470,7 @@
             <a:pPr lvl="0"/>
             <a:r>
               <a:rPr/>
-              <a:t>rixpress : </a:t>
+              <a:t>rixpress: </a:t>
             </a:r>
             <a:r>
               <a:rPr>
